--- a/output/wordlabs-hard-3day.pptx
+++ b/output/wordlabs-hard-3day.pptx
@@ -4240,7 +4240,7 @@
                 <a:ea typeface="Calibri" pitchFamily="34" charset="-122"/>
                 <a:cs typeface="Calibri" pitchFamily="34" charset="-120"/>
               </a:rPr>
-              <a:t>"firm, difficult, or strong"</a:t>
+              <a:t>"firm, solid, difficult, tough"</a:t>
             </a:r>
             <a:endParaRPr lang="en-US" sz="2200" dirty="0"/>
           </a:p>
@@ -5288,7 +5288,7 @@
                 <a:ea typeface="Calibri" pitchFamily="34" charset="-122"/>
                 <a:cs typeface="Calibri" pitchFamily="34" charset="-120"/>
               </a:rPr>
-              <a:t>Word Labs  •  wordlabs.app  •  Root: 'hard' = firm, difficult, or strong</a:t>
+              <a:t>Word Labs  •  wordlabs.app  •  Root: 'hard' = firm, solid, difficult, tough</a:t>
             </a:r>
             <a:endParaRPr lang="en-US" sz="800" dirty="0"/>
           </a:p>
@@ -5928,7 +5928,7 @@
                 <a:ea typeface="Calibri" pitchFamily="34" charset="-122"/>
                 <a:cs typeface="Calibri" pitchFamily="34" charset="-120"/>
               </a:rPr>
-              <a:t>Word Labs  •  wordlabs.app  •  Root: 'hard' = firm, difficult, or strong</a:t>
+              <a:t>Word Labs  •  wordlabs.app  •  Root: 'hard' = firm, solid, difficult, tough</a:t>
             </a:r>
             <a:endParaRPr lang="en-US" sz="800" dirty="0"/>
           </a:p>
@@ -6040,7 +6040,7 @@
                 <a:ea typeface="Calibri" pitchFamily="34" charset="-122"/>
                 <a:cs typeface="Calibri" pitchFamily="34" charset="-120"/>
               </a:rPr>
-              <a:t>The pioneers faced great </a:t>
+              <a:t>The </a:t>
             </a:r>
             <a:pPr algn="l" indent="0" marL="0">
               <a:buNone/>
@@ -6057,7 +6057,7 @@
                 <a:ea typeface="Calibri" pitchFamily="34" charset="-122"/>
                 <a:cs typeface="Calibri" pitchFamily="34" charset="-120"/>
               </a:rPr>
-              <a:t>hardship</a:t>
+              <a:t>hardworking</a:t>
             </a:r>
             <a:pPr algn="l" indent="0" marL="0">
               <a:buNone/>
@@ -6071,7 +6071,7 @@
                 <a:ea typeface="Calibri" pitchFamily="34" charset="-122"/>
                 <a:cs typeface="Calibri" pitchFamily="34" charset="-120"/>
               </a:rPr>
-              <a:t> on their journey, but they worked hard to </a:t>
+              <a:t> students barely complained, even though the maths task was the </a:t>
             </a:r>
             <a:pPr algn="l" indent="0" marL="0">
               <a:buNone/>
@@ -6088,7 +6088,7 @@
                 <a:ea typeface="Calibri" pitchFamily="34" charset="-122"/>
                 <a:cs typeface="Calibri" pitchFamily="34" charset="-120"/>
               </a:rPr>
-              <a:t>harden</a:t>
+              <a:t>hardest</a:t>
             </a:r>
             <a:pPr algn="l" indent="0" marL="0">
               <a:buNone/>
@@ -6102,7 +6102,7 @@
                 <a:ea typeface="Calibri" pitchFamily="34" charset="-122"/>
                 <a:cs typeface="Calibri" pitchFamily="34" charset="-120"/>
               </a:rPr>
-              <a:t> their shelters against the cold.</a:t>
+              <a:t> one they had ever attempted.</a:t>
             </a:r>
             <a:endParaRPr lang="en-US" sz="1800" dirty="0"/>
           </a:p>
@@ -6257,7 +6257,7 @@
                 <a:ea typeface="Trebuchet MS" pitchFamily="34" charset="-122"/>
                 <a:cs typeface="Trebuchet MS" pitchFamily="34" charset="-120"/>
               </a:rPr>
-              <a:t>hardship</a:t>
+              <a:t>hardworking</a:t>
             </a:r>
             <a:endParaRPr lang="en-US" sz="1400" dirty="0"/>
           </a:p>
@@ -6385,7 +6385,7 @@
                 <a:ea typeface="Trebuchet MS" pitchFamily="34" charset="-122"/>
                 <a:cs typeface="Trebuchet MS" pitchFamily="34" charset="-120"/>
               </a:rPr>
-              <a:t>harden</a:t>
+              <a:t>hardest</a:t>
             </a:r>
             <a:endParaRPr lang="en-US" sz="1400" dirty="0"/>
           </a:p>
@@ -6716,7 +6716,7 @@
                 <a:ea typeface="Calibri" pitchFamily="34" charset="-122"/>
                 <a:cs typeface="Calibri" pitchFamily="34" charset="-120"/>
               </a:rPr>
-              <a:t>Word Labs  •  wordlabs.app  •  Root: 'hard' = firm, difficult, or strong</a:t>
+              <a:t>Word Labs  •  wordlabs.app  •  Root: 'hard' = firm, solid, difficult, tough</a:t>
             </a:r>
             <a:endParaRPr lang="en-US" sz="800" dirty="0"/>
           </a:p>
@@ -6855,7 +6855,7 @@
                 <a:ea typeface="Trebuchet MS" pitchFamily="34" charset="-122"/>
                 <a:cs typeface="Trebuchet MS" pitchFamily="34" charset="-120"/>
               </a:rPr>
-              <a:t>hardship</a:t>
+              <a:t>hardworking</a:t>
             </a:r>
             <a:endParaRPr lang="en-US" sz="2800" dirty="0"/>
           </a:p>
@@ -7543,7 +7543,7 @@
                 <a:ea typeface="Calibri" pitchFamily="34" charset="-122"/>
                 <a:cs typeface="Calibri" pitchFamily="34" charset="-120"/>
               </a:rPr>
-              <a:t>Word Labs  •  wordlabs.app  •  Root: 'hard' = firm, difficult, or strong</a:t>
+              <a:t>Word Labs  •  wordlabs.app  •  Root: 'hard' = firm, solid, difficult, tough</a:t>
             </a:r>
             <a:endParaRPr lang="en-US" sz="800" dirty="0"/>
           </a:p>
@@ -7682,7 +7682,7 @@
                 <a:ea typeface="Trebuchet MS" pitchFamily="34" charset="-122"/>
                 <a:cs typeface="Trebuchet MS" pitchFamily="34" charset="-120"/>
               </a:rPr>
-              <a:t>hardship</a:t>
+              <a:t>hardworking</a:t>
             </a:r>
             <a:endParaRPr lang="en-US" sz="2800" dirty="0"/>
           </a:p>
@@ -7762,7 +7762,7 @@
         </p:nvSpPr>
         <p:spPr>
           <a:xfrm>
-            <a:off x="2938272" y="2258568"/>
+            <a:off x="2221992" y="2258568"/>
             <a:ext cx="1828800" cy="292608"/>
           </a:xfrm>
           <a:prstGeom prst="rect">
@@ -7796,7 +7796,7 @@
         </p:nvSpPr>
         <p:spPr>
           <a:xfrm>
-            <a:off x="2938272" y="2258568"/>
+            <a:off x="2221992" y="2258568"/>
             <a:ext cx="1828800" cy="292608"/>
           </a:xfrm>
           <a:prstGeom prst="rect">
@@ -7835,7 +7835,7 @@
         </p:nvSpPr>
         <p:spPr>
           <a:xfrm>
-            <a:off x="2938272" y="2569464"/>
+            <a:off x="2221992" y="2569464"/>
             <a:ext cx="1828800" cy="201168"/>
           </a:xfrm>
           <a:prstGeom prst="rect">
@@ -7860,7 +7860,7 @@
                 <a:ea typeface="Calibri" pitchFamily="34" charset="-122"/>
                 <a:cs typeface="Calibri" pitchFamily="34" charset="-120"/>
               </a:rPr>
-              <a:t>difficult or tough</a:t>
+              <a:t>firm, tough, difficult</a:t>
             </a:r>
             <a:endParaRPr lang="en-US" sz="850" dirty="0"/>
           </a:p>
@@ -7874,7 +7874,7 @@
         </p:nvSpPr>
         <p:spPr>
           <a:xfrm>
-            <a:off x="5803392" y="2258568"/>
+            <a:off x="4370832" y="2258568"/>
             <a:ext cx="1828800" cy="292608"/>
           </a:xfrm>
           <a:prstGeom prst="rect">
@@ -7908,7 +7908,7 @@
         </p:nvSpPr>
         <p:spPr>
           <a:xfrm>
-            <a:off x="5803392" y="2258568"/>
+            <a:off x="4370832" y="2258568"/>
             <a:ext cx="1828800" cy="292608"/>
           </a:xfrm>
           <a:prstGeom prst="rect">
@@ -7933,7 +7933,7 @@
                 <a:ea typeface="Trebuchet MS" pitchFamily="34" charset="-122"/>
                 <a:cs typeface="Trebuchet MS" pitchFamily="34" charset="-120"/>
               </a:rPr>
-              <a:t>ship</a:t>
+              <a:t>work</a:t>
             </a:r>
             <a:endParaRPr lang="en-US" sz="1300" dirty="0"/>
           </a:p>
@@ -7947,7 +7947,7 @@
         </p:nvSpPr>
         <p:spPr>
           <a:xfrm>
-            <a:off x="5803392" y="2569464"/>
+            <a:off x="4370832" y="2569464"/>
             <a:ext cx="1828800" cy="201168"/>
           </a:xfrm>
           <a:prstGeom prst="rect">
@@ -7972,7 +7972,7 @@
                 <a:ea typeface="Calibri" pitchFamily="34" charset="-122"/>
                 <a:cs typeface="Calibri" pitchFamily="34" charset="-120"/>
               </a:rPr>
-              <a:t>state or condition of</a:t>
+              <a:t>to do effort or labour</a:t>
             </a:r>
             <a:endParaRPr lang="en-US" sz="850" dirty="0"/>
           </a:p>
@@ -7981,6 +7981,118 @@
       <p:sp>
         <p:nvSpPr>
           <p:cNvPr id="22" name="Shape 20"/>
+          <p:cNvSpPr/>
+          <p:nvPr/>
+        </p:nvSpPr>
+        <p:spPr>
+          <a:xfrm>
+            <a:off x="6519672" y="2258568"/>
+            <a:ext cx="1828800" cy="292608"/>
+          </a:xfrm>
+          <a:prstGeom prst="rect">
+            <a:avLst>
+              <a:gd name="adj" fmla="val 25000"/>
+            </a:avLst>
+          </a:prstGeom>
+          <a:solidFill>
+            <a:srgbClr val="FCE7F3"/>
+          </a:solidFill>
+          <a:ln w="19050">
+            <a:solidFill>
+              <a:srgbClr val="DB2777"/>
+            </a:solidFill>
+            <a:prstDash val="solid"/>
+          </a:ln>
+          <a:effectLst>
+            <a:outerShdw sx="100000" sy="100000" kx="0" ky="0" algn="bl" rotWithShape="0" blurRad="101600" dist="38100" dir="8100000">
+              <a:srgbClr val="000000">
+                <a:alpha val="12000"/>
+              </a:srgbClr>
+            </a:outerShdw>
+          </a:effectLst>
+        </p:spPr>
+      </p:sp>
+      <p:sp>
+        <p:nvSpPr>
+          <p:cNvPr id="23" name="Text 21"/>
+          <p:cNvSpPr/>
+          <p:nvPr/>
+        </p:nvSpPr>
+        <p:spPr>
+          <a:xfrm>
+            <a:off x="6519672" y="2258568"/>
+            <a:ext cx="1828800" cy="292608"/>
+          </a:xfrm>
+          <a:prstGeom prst="rect">
+            <a:avLst/>
+          </a:prstGeom>
+          <a:noFill/>
+          <a:ln/>
+        </p:spPr>
+        <p:txBody>
+          <a:bodyPr wrap="square" lIns="0" tIns="0" rIns="0" bIns="0" rtlCol="0" anchor="ctr"/>
+          <a:lstStyle/>
+          <a:p>
+            <a:pPr algn="ctr" indent="0" marL="0">
+              <a:buNone/>
+            </a:pPr>
+            <a:r>
+              <a:rPr lang="en-US" sz="1300" b="1" dirty="0">
+                <a:solidFill>
+                  <a:srgbClr val="9D174D"/>
+                </a:solidFill>
+                <a:latin typeface="Trebuchet MS" pitchFamily="34" charset="0"/>
+                <a:ea typeface="Trebuchet MS" pitchFamily="34" charset="-122"/>
+                <a:cs typeface="Trebuchet MS" pitchFamily="34" charset="-120"/>
+              </a:rPr>
+              <a:t>ing</a:t>
+            </a:r>
+            <a:endParaRPr lang="en-US" sz="1300" dirty="0"/>
+          </a:p>
+        </p:txBody>
+      </p:sp>
+      <p:sp>
+        <p:nvSpPr>
+          <p:cNvPr id="24" name="Text 22"/>
+          <p:cNvSpPr/>
+          <p:nvPr/>
+        </p:nvSpPr>
+        <p:spPr>
+          <a:xfrm>
+            <a:off x="6519672" y="2569464"/>
+            <a:ext cx="1828800" cy="201168"/>
+          </a:xfrm>
+          <a:prstGeom prst="rect">
+            <a:avLst/>
+          </a:prstGeom>
+          <a:noFill/>
+          <a:ln/>
+        </p:spPr>
+        <p:txBody>
+          <a:bodyPr wrap="square" lIns="0" tIns="0" rIns="0" bIns="0" rtlCol="0" anchor="t"/>
+          <a:lstStyle/>
+          <a:p>
+            <a:pPr algn="ctr" indent="0" marL="0">
+              <a:buNone/>
+            </a:pPr>
+            <a:r>
+              <a:rPr lang="en-US" sz="850" dirty="0">
+                <a:solidFill>
+                  <a:srgbClr val="475569"/>
+                </a:solidFill>
+                <a:latin typeface="Calibri" pitchFamily="34" charset="0"/>
+                <a:ea typeface="Calibri" pitchFamily="34" charset="-122"/>
+                <a:cs typeface="Calibri" pitchFamily="34" charset="-120"/>
+              </a:rPr>
+              <a:t>doing (present participle)</a:t>
+            </a:r>
+            <a:endParaRPr lang="en-US" sz="850" dirty="0"/>
+          </a:p>
+        </p:txBody>
+      </p:sp>
+      <p:sp>
+        <p:nvSpPr>
+          <p:cNvPr id="25" name="Shape 23"/>
           <p:cNvSpPr/>
           <p:nvPr/>
         </p:nvSpPr>
@@ -8007,7 +8119,7 @@
       </p:sp>
       <p:sp>
         <p:nvSpPr>
-          <p:cNvPr id="23" name="Text 21"/>
+          <p:cNvPr id="26" name="Text 24"/>
           <p:cNvSpPr/>
           <p:nvPr/>
         </p:nvSpPr>
@@ -8046,7 +8158,7 @@
       </p:sp>
       <p:sp>
         <p:nvSpPr>
-          <p:cNvPr id="24" name="Shape 22"/>
+          <p:cNvPr id="27" name="Shape 25"/>
           <p:cNvSpPr/>
           <p:nvPr/>
         </p:nvSpPr>
@@ -8073,7 +8185,7 @@
       </p:sp>
       <p:sp>
         <p:nvSpPr>
-          <p:cNvPr id="25" name="Text 23"/>
+          <p:cNvPr id="28" name="Text 26"/>
           <p:cNvSpPr/>
           <p:nvPr/>
         </p:nvSpPr>
@@ -8112,7 +8224,7 @@
       </p:sp>
       <p:sp>
         <p:nvSpPr>
-          <p:cNvPr id="26" name="Shape 24"/>
+          <p:cNvPr id="29" name="Shape 27"/>
           <p:cNvSpPr/>
           <p:nvPr/>
         </p:nvSpPr>
@@ -8139,7 +8251,7 @@
       </p:sp>
       <p:sp>
         <p:nvSpPr>
-          <p:cNvPr id="27" name="Text 25"/>
+          <p:cNvPr id="30" name="Text 28"/>
           <p:cNvSpPr/>
           <p:nvPr/>
         </p:nvSpPr>
@@ -8178,7 +8290,7 @@
       </p:sp>
       <p:sp>
         <p:nvSpPr>
-          <p:cNvPr id="28" name="Shape 26"/>
+          <p:cNvPr id="31" name="Shape 29"/>
           <p:cNvSpPr/>
           <p:nvPr/>
         </p:nvSpPr>
@@ -8205,7 +8317,7 @@
       </p:sp>
       <p:sp>
         <p:nvSpPr>
-          <p:cNvPr id="29" name="Text 27"/>
+          <p:cNvPr id="32" name="Text 30"/>
           <p:cNvSpPr/>
           <p:nvPr/>
         </p:nvSpPr>
@@ -8528,7 +8640,7 @@
                 <a:ea typeface="Calibri" pitchFamily="34" charset="-122"/>
                 <a:cs typeface="Calibri" pitchFamily="34" charset="-120"/>
               </a:rPr>
-              <a:t>Word Labs  •  wordlabs.app  •  Root: 'hard' = firm, difficult, or strong</a:t>
+              <a:t>Word Labs  •  wordlabs.app  •  Root: 'hard' = firm, solid, difficult, tough</a:t>
             </a:r>
             <a:endParaRPr lang="en-US" sz="800" dirty="0"/>
           </a:p>
@@ -8667,7 +8779,7 @@
                 <a:ea typeface="Trebuchet MS" pitchFamily="34" charset="-122"/>
                 <a:cs typeface="Trebuchet MS" pitchFamily="34" charset="-120"/>
               </a:rPr>
-              <a:t>hardship</a:t>
+              <a:t>hardworking</a:t>
             </a:r>
             <a:endParaRPr lang="en-US" sz="2800" dirty="0"/>
           </a:p>
@@ -8747,7 +8859,7 @@
         </p:nvSpPr>
         <p:spPr>
           <a:xfrm>
-            <a:off x="2938272" y="2258568"/>
+            <a:off x="2221992" y="2258568"/>
             <a:ext cx="1828800" cy="292608"/>
           </a:xfrm>
           <a:prstGeom prst="rect">
@@ -8781,7 +8893,7 @@
         </p:nvSpPr>
         <p:spPr>
           <a:xfrm>
-            <a:off x="2938272" y="2258568"/>
+            <a:off x="2221992" y="2258568"/>
             <a:ext cx="1828800" cy="292608"/>
           </a:xfrm>
           <a:prstGeom prst="rect">
@@ -8820,7 +8932,7 @@
         </p:nvSpPr>
         <p:spPr>
           <a:xfrm>
-            <a:off x="2938272" y="2569464"/>
+            <a:off x="2221992" y="2569464"/>
             <a:ext cx="1828800" cy="201168"/>
           </a:xfrm>
           <a:prstGeom prst="rect">
@@ -8845,7 +8957,7 @@
                 <a:ea typeface="Calibri" pitchFamily="34" charset="-122"/>
                 <a:cs typeface="Calibri" pitchFamily="34" charset="-120"/>
               </a:rPr>
-              <a:t>difficult or tough</a:t>
+              <a:t>firm, tough, difficult</a:t>
             </a:r>
             <a:endParaRPr lang="en-US" sz="850" dirty="0"/>
           </a:p>
@@ -8859,7 +8971,7 @@
         </p:nvSpPr>
         <p:spPr>
           <a:xfrm>
-            <a:off x="5803392" y="2258568"/>
+            <a:off x="4370832" y="2258568"/>
             <a:ext cx="1828800" cy="292608"/>
           </a:xfrm>
           <a:prstGeom prst="rect">
@@ -8893,7 +9005,7 @@
         </p:nvSpPr>
         <p:spPr>
           <a:xfrm>
-            <a:off x="5803392" y="2258568"/>
+            <a:off x="4370832" y="2258568"/>
             <a:ext cx="1828800" cy="292608"/>
           </a:xfrm>
           <a:prstGeom prst="rect">
@@ -8918,7 +9030,7 @@
                 <a:ea typeface="Trebuchet MS" pitchFamily="34" charset="-122"/>
                 <a:cs typeface="Trebuchet MS" pitchFamily="34" charset="-120"/>
               </a:rPr>
-              <a:t>ship</a:t>
+              <a:t>work</a:t>
             </a:r>
             <a:endParaRPr lang="en-US" sz="1300" dirty="0"/>
           </a:p>
@@ -8932,7 +9044,7 @@
         </p:nvSpPr>
         <p:spPr>
           <a:xfrm>
-            <a:off x="5803392" y="2569464"/>
+            <a:off x="4370832" y="2569464"/>
             <a:ext cx="1828800" cy="201168"/>
           </a:xfrm>
           <a:prstGeom prst="rect">
@@ -8957,7 +9069,7 @@
                 <a:ea typeface="Calibri" pitchFamily="34" charset="-122"/>
                 <a:cs typeface="Calibri" pitchFamily="34" charset="-120"/>
               </a:rPr>
-              <a:t>state or condition of</a:t>
+              <a:t>to do effort or labour</a:t>
             </a:r>
             <a:endParaRPr lang="en-US" sz="850" dirty="0"/>
           </a:p>
@@ -8966,6 +9078,118 @@
       <p:sp>
         <p:nvSpPr>
           <p:cNvPr id="22" name="Shape 20"/>
+          <p:cNvSpPr/>
+          <p:nvPr/>
+        </p:nvSpPr>
+        <p:spPr>
+          <a:xfrm>
+            <a:off x="6519672" y="2258568"/>
+            <a:ext cx="1828800" cy="292608"/>
+          </a:xfrm>
+          <a:prstGeom prst="rect">
+            <a:avLst>
+              <a:gd name="adj" fmla="val 25000"/>
+            </a:avLst>
+          </a:prstGeom>
+          <a:solidFill>
+            <a:srgbClr val="FCE7F3"/>
+          </a:solidFill>
+          <a:ln w="19050">
+            <a:solidFill>
+              <a:srgbClr val="DB2777"/>
+            </a:solidFill>
+            <a:prstDash val="solid"/>
+          </a:ln>
+          <a:effectLst>
+            <a:outerShdw sx="100000" sy="100000" kx="0" ky="0" algn="bl" rotWithShape="0" blurRad="101600" dist="38100" dir="8100000">
+              <a:srgbClr val="000000">
+                <a:alpha val="12000"/>
+              </a:srgbClr>
+            </a:outerShdw>
+          </a:effectLst>
+        </p:spPr>
+      </p:sp>
+      <p:sp>
+        <p:nvSpPr>
+          <p:cNvPr id="23" name="Text 21"/>
+          <p:cNvSpPr/>
+          <p:nvPr/>
+        </p:nvSpPr>
+        <p:spPr>
+          <a:xfrm>
+            <a:off x="6519672" y="2258568"/>
+            <a:ext cx="1828800" cy="292608"/>
+          </a:xfrm>
+          <a:prstGeom prst="rect">
+            <a:avLst/>
+          </a:prstGeom>
+          <a:noFill/>
+          <a:ln/>
+        </p:spPr>
+        <p:txBody>
+          <a:bodyPr wrap="square" lIns="0" tIns="0" rIns="0" bIns="0" rtlCol="0" anchor="ctr"/>
+          <a:lstStyle/>
+          <a:p>
+            <a:pPr algn="ctr" indent="0" marL="0">
+              <a:buNone/>
+            </a:pPr>
+            <a:r>
+              <a:rPr lang="en-US" sz="1300" b="1" dirty="0">
+                <a:solidFill>
+                  <a:srgbClr val="9D174D"/>
+                </a:solidFill>
+                <a:latin typeface="Trebuchet MS" pitchFamily="34" charset="0"/>
+                <a:ea typeface="Trebuchet MS" pitchFamily="34" charset="-122"/>
+                <a:cs typeface="Trebuchet MS" pitchFamily="34" charset="-120"/>
+              </a:rPr>
+              <a:t>ing</a:t>
+            </a:r>
+            <a:endParaRPr lang="en-US" sz="1300" dirty="0"/>
+          </a:p>
+        </p:txBody>
+      </p:sp>
+      <p:sp>
+        <p:nvSpPr>
+          <p:cNvPr id="24" name="Text 22"/>
+          <p:cNvSpPr/>
+          <p:nvPr/>
+        </p:nvSpPr>
+        <p:spPr>
+          <a:xfrm>
+            <a:off x="6519672" y="2569464"/>
+            <a:ext cx="1828800" cy="201168"/>
+          </a:xfrm>
+          <a:prstGeom prst="rect">
+            <a:avLst/>
+          </a:prstGeom>
+          <a:noFill/>
+          <a:ln/>
+        </p:spPr>
+        <p:txBody>
+          <a:bodyPr wrap="square" lIns="0" tIns="0" rIns="0" bIns="0" rtlCol="0" anchor="t"/>
+          <a:lstStyle/>
+          <a:p>
+            <a:pPr algn="ctr" indent="0" marL="0">
+              <a:buNone/>
+            </a:pPr>
+            <a:r>
+              <a:rPr lang="en-US" sz="850" dirty="0">
+                <a:solidFill>
+                  <a:srgbClr val="475569"/>
+                </a:solidFill>
+                <a:latin typeface="Calibri" pitchFamily="34" charset="0"/>
+                <a:ea typeface="Calibri" pitchFamily="34" charset="-122"/>
+                <a:cs typeface="Calibri" pitchFamily="34" charset="-120"/>
+              </a:rPr>
+              <a:t>doing (present participle)</a:t>
+            </a:r>
+            <a:endParaRPr lang="en-US" sz="850" dirty="0"/>
+          </a:p>
+        </p:txBody>
+      </p:sp>
+      <p:sp>
+        <p:nvSpPr>
+          <p:cNvPr id="25" name="Shape 23"/>
           <p:cNvSpPr/>
           <p:nvPr/>
         </p:nvSpPr>
@@ -8992,7 +9216,7 @@
       </p:sp>
       <p:sp>
         <p:nvSpPr>
-          <p:cNvPr id="23" name="Text 21"/>
+          <p:cNvPr id="26" name="Text 24"/>
           <p:cNvSpPr/>
           <p:nvPr/>
         </p:nvSpPr>
@@ -9031,7 +9255,7 @@
       </p:sp>
       <p:sp>
         <p:nvSpPr>
-          <p:cNvPr id="24" name="Shape 22"/>
+          <p:cNvPr id="27" name="Shape 25"/>
           <p:cNvSpPr/>
           <p:nvPr/>
         </p:nvSpPr>
@@ -9058,13 +9282,13 @@
       </p:sp>
       <p:sp>
         <p:nvSpPr>
-          <p:cNvPr id="25" name="Shape 23"/>
-          <p:cNvSpPr/>
-          <p:nvPr/>
-        </p:nvSpPr>
-        <p:spPr>
-          <a:xfrm>
-            <a:off x="2999232" y="3364992"/>
+          <p:cNvPr id="28" name="Shape 26"/>
+          <p:cNvSpPr/>
+          <p:nvPr/>
+        </p:nvSpPr>
+        <p:spPr>
+          <a:xfrm>
+            <a:off x="2313432" y="3364992"/>
             <a:ext cx="1645920" cy="475488"/>
           </a:xfrm>
           <a:prstGeom prst="rect">
@@ -9085,13 +9309,13 @@
       </p:sp>
       <p:sp>
         <p:nvSpPr>
-          <p:cNvPr id="26" name="Text 24"/>
-          <p:cNvSpPr/>
-          <p:nvPr/>
-        </p:nvSpPr>
-        <p:spPr>
-          <a:xfrm>
-            <a:off x="2999232" y="3364992"/>
+          <p:cNvPr id="29" name="Text 27"/>
+          <p:cNvSpPr/>
+          <p:nvPr/>
+        </p:nvSpPr>
+        <p:spPr>
+          <a:xfrm>
+            <a:off x="2313432" y="3364992"/>
             <a:ext cx="1645920" cy="475488"/>
           </a:xfrm>
           <a:prstGeom prst="rect">
@@ -9124,14 +9348,14 @@
       </p:sp>
       <p:sp>
         <p:nvSpPr>
-          <p:cNvPr id="27" name="Text 25"/>
-          <p:cNvSpPr/>
-          <p:nvPr/>
-        </p:nvSpPr>
-        <p:spPr>
-          <a:xfrm>
-            <a:off x="4645152" y="3364992"/>
-            <a:ext cx="1097280" cy="475488"/>
+          <p:cNvPr id="30" name="Text 28"/>
+          <p:cNvSpPr/>
+          <p:nvPr/>
+        </p:nvSpPr>
+        <p:spPr>
+          <a:xfrm>
+            <a:off x="3959352" y="3364992"/>
+            <a:ext cx="411480" cy="475488"/>
           </a:xfrm>
           <a:prstGeom prst="rect">
             <a:avLst/>
@@ -9163,13 +9387,13 @@
       </p:sp>
       <p:sp>
         <p:nvSpPr>
-          <p:cNvPr id="28" name="Shape 26"/>
-          <p:cNvSpPr/>
-          <p:nvPr/>
-        </p:nvSpPr>
-        <p:spPr>
-          <a:xfrm>
-            <a:off x="5742432" y="3364992"/>
+          <p:cNvPr id="31" name="Shape 29"/>
+          <p:cNvSpPr/>
+          <p:nvPr/>
+        </p:nvSpPr>
+        <p:spPr>
+          <a:xfrm>
+            <a:off x="4370832" y="3364992"/>
             <a:ext cx="1645920" cy="475488"/>
           </a:xfrm>
           <a:prstGeom prst="rect">
@@ -9190,13 +9414,13 @@
       </p:sp>
       <p:sp>
         <p:nvSpPr>
-          <p:cNvPr id="29" name="Text 27"/>
-          <p:cNvSpPr/>
-          <p:nvPr/>
-        </p:nvSpPr>
-        <p:spPr>
-          <a:xfrm>
-            <a:off x="5742432" y="3364992"/>
+          <p:cNvPr id="32" name="Text 30"/>
+          <p:cNvSpPr/>
+          <p:nvPr/>
+        </p:nvSpPr>
+        <p:spPr>
+          <a:xfrm>
+            <a:off x="4370832" y="3364992"/>
             <a:ext cx="1645920" cy="475488"/>
           </a:xfrm>
           <a:prstGeom prst="rect">
@@ -9221,7 +9445,7 @@
                 <a:ea typeface="Trebuchet MS" pitchFamily="34" charset="-122"/>
                 <a:cs typeface="Trebuchet MS" pitchFamily="34" charset="-120"/>
               </a:rPr>
-              <a:t>ship</a:t>
+              <a:t>work</a:t>
             </a:r>
             <a:endParaRPr lang="en-US" sz="1400" dirty="0"/>
           </a:p>
@@ -9229,7 +9453,112 @@
       </p:sp>
       <p:sp>
         <p:nvSpPr>
-          <p:cNvPr id="30" name="Shape 28"/>
+          <p:cNvPr id="33" name="Text 31"/>
+          <p:cNvSpPr/>
+          <p:nvPr/>
+        </p:nvSpPr>
+        <p:spPr>
+          <a:xfrm>
+            <a:off x="6016752" y="3364992"/>
+            <a:ext cx="411480" cy="475488"/>
+          </a:xfrm>
+          <a:prstGeom prst="rect">
+            <a:avLst/>
+          </a:prstGeom>
+          <a:noFill/>
+          <a:ln/>
+        </p:spPr>
+        <p:txBody>
+          <a:bodyPr wrap="square" lIns="0" tIns="0" rIns="0" bIns="0" rtlCol="0" anchor="ctr"/>
+          <a:lstStyle/>
+          <a:p>
+            <a:pPr algn="ctr" indent="0" marL="0">
+              <a:buNone/>
+            </a:pPr>
+            <a:r>
+              <a:rPr lang="en-US" sz="1600" b="1" dirty="0">
+                <a:solidFill>
+                  <a:srgbClr val="0D9488"/>
+                </a:solidFill>
+                <a:latin typeface="Trebuchet MS" pitchFamily="34" charset="0"/>
+                <a:ea typeface="Trebuchet MS" pitchFamily="34" charset="-122"/>
+                <a:cs typeface="Trebuchet MS" pitchFamily="34" charset="-120"/>
+              </a:rPr>
+              <a:t>·</a:t>
+            </a:r>
+            <a:endParaRPr lang="en-US" sz="1600" dirty="0"/>
+          </a:p>
+        </p:txBody>
+      </p:sp>
+      <p:sp>
+        <p:nvSpPr>
+          <p:cNvPr id="34" name="Shape 32"/>
+          <p:cNvSpPr/>
+          <p:nvPr/>
+        </p:nvSpPr>
+        <p:spPr>
+          <a:xfrm>
+            <a:off x="6428232" y="3364992"/>
+            <a:ext cx="1645920" cy="475488"/>
+          </a:xfrm>
+          <a:prstGeom prst="rect">
+            <a:avLst>
+              <a:gd name="adj" fmla="val 9615"/>
+            </a:avLst>
+          </a:prstGeom>
+          <a:solidFill>
+            <a:srgbClr val="FFFFFF"/>
+          </a:solidFill>
+          <a:ln w="12700">
+            <a:solidFill>
+              <a:srgbClr val="0D9488"/>
+            </a:solidFill>
+            <a:prstDash val="solid"/>
+          </a:ln>
+        </p:spPr>
+      </p:sp>
+      <p:sp>
+        <p:nvSpPr>
+          <p:cNvPr id="35" name="Text 33"/>
+          <p:cNvSpPr/>
+          <p:nvPr/>
+        </p:nvSpPr>
+        <p:spPr>
+          <a:xfrm>
+            <a:off x="6428232" y="3364992"/>
+            <a:ext cx="1645920" cy="475488"/>
+          </a:xfrm>
+          <a:prstGeom prst="rect">
+            <a:avLst/>
+          </a:prstGeom>
+          <a:noFill/>
+          <a:ln/>
+        </p:spPr>
+        <p:txBody>
+          <a:bodyPr wrap="square" lIns="0" tIns="0" rIns="0" bIns="0" rtlCol="0" anchor="ctr"/>
+          <a:lstStyle/>
+          <a:p>
+            <a:pPr algn="ctr" indent="0" marL="0">
+              <a:buNone/>
+            </a:pPr>
+            <a:r>
+              <a:rPr lang="en-US" sz="1400" b="1" dirty="0">
+                <a:solidFill>
+                  <a:srgbClr val="0D9488"/>
+                </a:solidFill>
+                <a:latin typeface="Trebuchet MS" pitchFamily="34" charset="0"/>
+                <a:ea typeface="Trebuchet MS" pitchFamily="34" charset="-122"/>
+                <a:cs typeface="Trebuchet MS" pitchFamily="34" charset="-120"/>
+              </a:rPr>
+              <a:t>ing</a:t>
+            </a:r>
+            <a:endParaRPr lang="en-US" sz="1400" dirty="0"/>
+          </a:p>
+        </p:txBody>
+      </p:sp>
+      <p:sp>
+        <p:nvSpPr>
+          <p:cNvPr id="36" name="Shape 34"/>
           <p:cNvSpPr/>
           <p:nvPr/>
         </p:nvSpPr>
@@ -9256,7 +9585,7 @@
       </p:sp>
       <p:sp>
         <p:nvSpPr>
-          <p:cNvPr id="31" name="Text 29"/>
+          <p:cNvPr id="37" name="Text 35"/>
           <p:cNvSpPr/>
           <p:nvPr/>
         </p:nvSpPr>
@@ -9295,7 +9624,7 @@
       </p:sp>
       <p:sp>
         <p:nvSpPr>
-          <p:cNvPr id="32" name="Shape 30"/>
+          <p:cNvPr id="38" name="Shape 36"/>
           <p:cNvSpPr/>
           <p:nvPr/>
         </p:nvSpPr>
@@ -9322,7 +9651,7 @@
       </p:sp>
       <p:sp>
         <p:nvSpPr>
-          <p:cNvPr id="33" name="Text 31"/>
+          <p:cNvPr id="39" name="Text 37"/>
           <p:cNvSpPr/>
           <p:nvPr/>
         </p:nvSpPr>
@@ -9645,7 +9974,7 @@
                 <a:ea typeface="Calibri" pitchFamily="34" charset="-122"/>
                 <a:cs typeface="Calibri" pitchFamily="34" charset="-120"/>
               </a:rPr>
-              <a:t>Word Labs  •  wordlabs.app  •  Root: 'hard' = firm, difficult, or strong</a:t>
+              <a:t>Word Labs  •  wordlabs.app  •  Root: 'hard' = firm, solid, difficult, tough</a:t>
             </a:r>
             <a:endParaRPr lang="en-US" sz="800" dirty="0"/>
           </a:p>
@@ -9784,7 +10113,7 @@
                 <a:ea typeface="Trebuchet MS" pitchFamily="34" charset="-122"/>
                 <a:cs typeface="Trebuchet MS" pitchFamily="34" charset="-120"/>
               </a:rPr>
-              <a:t>hardship</a:t>
+              <a:t>hardworking</a:t>
             </a:r>
             <a:endParaRPr lang="en-US" sz="2800" dirty="0"/>
           </a:p>
@@ -9864,7 +10193,7 @@
         </p:nvSpPr>
         <p:spPr>
           <a:xfrm>
-            <a:off x="2938272" y="2258568"/>
+            <a:off x="2221992" y="2258568"/>
             <a:ext cx="1828800" cy="292608"/>
           </a:xfrm>
           <a:prstGeom prst="rect">
@@ -9898,7 +10227,7 @@
         </p:nvSpPr>
         <p:spPr>
           <a:xfrm>
-            <a:off x="2938272" y="2258568"/>
+            <a:off x="2221992" y="2258568"/>
             <a:ext cx="1828800" cy="292608"/>
           </a:xfrm>
           <a:prstGeom prst="rect">
@@ -9937,7 +10266,7 @@
         </p:nvSpPr>
         <p:spPr>
           <a:xfrm>
-            <a:off x="2938272" y="2569464"/>
+            <a:off x="2221992" y="2569464"/>
             <a:ext cx="1828800" cy="201168"/>
           </a:xfrm>
           <a:prstGeom prst="rect">
@@ -9962,7 +10291,7 @@
                 <a:ea typeface="Calibri" pitchFamily="34" charset="-122"/>
                 <a:cs typeface="Calibri" pitchFamily="34" charset="-120"/>
               </a:rPr>
-              <a:t>difficult or tough</a:t>
+              <a:t>firm, tough, difficult</a:t>
             </a:r>
             <a:endParaRPr lang="en-US" sz="850" dirty="0"/>
           </a:p>
@@ -9976,7 +10305,7 @@
         </p:nvSpPr>
         <p:spPr>
           <a:xfrm>
-            <a:off x="5803392" y="2258568"/>
+            <a:off x="4370832" y="2258568"/>
             <a:ext cx="1828800" cy="292608"/>
           </a:xfrm>
           <a:prstGeom prst="rect">
@@ -10010,7 +10339,7 @@
         </p:nvSpPr>
         <p:spPr>
           <a:xfrm>
-            <a:off x="5803392" y="2258568"/>
+            <a:off x="4370832" y="2258568"/>
             <a:ext cx="1828800" cy="292608"/>
           </a:xfrm>
           <a:prstGeom prst="rect">
@@ -10035,7 +10364,7 @@
                 <a:ea typeface="Trebuchet MS" pitchFamily="34" charset="-122"/>
                 <a:cs typeface="Trebuchet MS" pitchFamily="34" charset="-120"/>
               </a:rPr>
-              <a:t>ship</a:t>
+              <a:t>work</a:t>
             </a:r>
             <a:endParaRPr lang="en-US" sz="1300" dirty="0"/>
           </a:p>
@@ -10049,7 +10378,7 @@
         </p:nvSpPr>
         <p:spPr>
           <a:xfrm>
-            <a:off x="5803392" y="2569464"/>
+            <a:off x="4370832" y="2569464"/>
             <a:ext cx="1828800" cy="201168"/>
           </a:xfrm>
           <a:prstGeom prst="rect">
@@ -10074,7 +10403,7 @@
                 <a:ea typeface="Calibri" pitchFamily="34" charset="-122"/>
                 <a:cs typeface="Calibri" pitchFamily="34" charset="-120"/>
               </a:rPr>
-              <a:t>state or condition of</a:t>
+              <a:t>to do effort or labour</a:t>
             </a:r>
             <a:endParaRPr lang="en-US" sz="850" dirty="0"/>
           </a:p>
@@ -10083,6 +10412,118 @@
       <p:sp>
         <p:nvSpPr>
           <p:cNvPr id="22" name="Shape 20"/>
+          <p:cNvSpPr/>
+          <p:nvPr/>
+        </p:nvSpPr>
+        <p:spPr>
+          <a:xfrm>
+            <a:off x="6519672" y="2258568"/>
+            <a:ext cx="1828800" cy="292608"/>
+          </a:xfrm>
+          <a:prstGeom prst="rect">
+            <a:avLst>
+              <a:gd name="adj" fmla="val 25000"/>
+            </a:avLst>
+          </a:prstGeom>
+          <a:solidFill>
+            <a:srgbClr val="FCE7F3"/>
+          </a:solidFill>
+          <a:ln w="19050">
+            <a:solidFill>
+              <a:srgbClr val="DB2777"/>
+            </a:solidFill>
+            <a:prstDash val="solid"/>
+          </a:ln>
+          <a:effectLst>
+            <a:outerShdw sx="100000" sy="100000" kx="0" ky="0" algn="bl" rotWithShape="0" blurRad="101600" dist="38100" dir="8100000">
+              <a:srgbClr val="000000">
+                <a:alpha val="12000"/>
+              </a:srgbClr>
+            </a:outerShdw>
+          </a:effectLst>
+        </p:spPr>
+      </p:sp>
+      <p:sp>
+        <p:nvSpPr>
+          <p:cNvPr id="23" name="Text 21"/>
+          <p:cNvSpPr/>
+          <p:nvPr/>
+        </p:nvSpPr>
+        <p:spPr>
+          <a:xfrm>
+            <a:off x="6519672" y="2258568"/>
+            <a:ext cx="1828800" cy="292608"/>
+          </a:xfrm>
+          <a:prstGeom prst="rect">
+            <a:avLst/>
+          </a:prstGeom>
+          <a:noFill/>
+          <a:ln/>
+        </p:spPr>
+        <p:txBody>
+          <a:bodyPr wrap="square" lIns="0" tIns="0" rIns="0" bIns="0" rtlCol="0" anchor="ctr"/>
+          <a:lstStyle/>
+          <a:p>
+            <a:pPr algn="ctr" indent="0" marL="0">
+              <a:buNone/>
+            </a:pPr>
+            <a:r>
+              <a:rPr lang="en-US" sz="1300" b="1" dirty="0">
+                <a:solidFill>
+                  <a:srgbClr val="9D174D"/>
+                </a:solidFill>
+                <a:latin typeface="Trebuchet MS" pitchFamily="34" charset="0"/>
+                <a:ea typeface="Trebuchet MS" pitchFamily="34" charset="-122"/>
+                <a:cs typeface="Trebuchet MS" pitchFamily="34" charset="-120"/>
+              </a:rPr>
+              <a:t>ing</a:t>
+            </a:r>
+            <a:endParaRPr lang="en-US" sz="1300" dirty="0"/>
+          </a:p>
+        </p:txBody>
+      </p:sp>
+      <p:sp>
+        <p:nvSpPr>
+          <p:cNvPr id="24" name="Text 22"/>
+          <p:cNvSpPr/>
+          <p:nvPr/>
+        </p:nvSpPr>
+        <p:spPr>
+          <a:xfrm>
+            <a:off x="6519672" y="2569464"/>
+            <a:ext cx="1828800" cy="201168"/>
+          </a:xfrm>
+          <a:prstGeom prst="rect">
+            <a:avLst/>
+          </a:prstGeom>
+          <a:noFill/>
+          <a:ln/>
+        </p:spPr>
+        <p:txBody>
+          <a:bodyPr wrap="square" lIns="0" tIns="0" rIns="0" bIns="0" rtlCol="0" anchor="t"/>
+          <a:lstStyle/>
+          <a:p>
+            <a:pPr algn="ctr" indent="0" marL="0">
+              <a:buNone/>
+            </a:pPr>
+            <a:r>
+              <a:rPr lang="en-US" sz="850" dirty="0">
+                <a:solidFill>
+                  <a:srgbClr val="475569"/>
+                </a:solidFill>
+                <a:latin typeface="Calibri" pitchFamily="34" charset="0"/>
+                <a:ea typeface="Calibri" pitchFamily="34" charset="-122"/>
+                <a:cs typeface="Calibri" pitchFamily="34" charset="-120"/>
+              </a:rPr>
+              <a:t>doing (present participle)</a:t>
+            </a:r>
+            <a:endParaRPr lang="en-US" sz="850" dirty="0"/>
+          </a:p>
+        </p:txBody>
+      </p:sp>
+      <p:sp>
+        <p:nvSpPr>
+          <p:cNvPr id="25" name="Shape 23"/>
           <p:cNvSpPr/>
           <p:nvPr/>
         </p:nvSpPr>
@@ -10109,7 +10550,7 @@
       </p:sp>
       <p:sp>
         <p:nvSpPr>
-          <p:cNvPr id="23" name="Text 21"/>
+          <p:cNvPr id="26" name="Text 24"/>
           <p:cNvSpPr/>
           <p:nvPr/>
         </p:nvSpPr>
@@ -10148,7 +10589,7 @@
       </p:sp>
       <p:sp>
         <p:nvSpPr>
-          <p:cNvPr id="24" name="Shape 22"/>
+          <p:cNvPr id="27" name="Shape 25"/>
           <p:cNvSpPr/>
           <p:nvPr/>
         </p:nvSpPr>
@@ -10175,13 +10616,13 @@
       </p:sp>
       <p:sp>
         <p:nvSpPr>
-          <p:cNvPr id="25" name="Shape 23"/>
-          <p:cNvSpPr/>
-          <p:nvPr/>
-        </p:nvSpPr>
-        <p:spPr>
-          <a:xfrm>
-            <a:off x="2999232" y="3364992"/>
+          <p:cNvPr id="28" name="Shape 26"/>
+          <p:cNvSpPr/>
+          <p:nvPr/>
+        </p:nvSpPr>
+        <p:spPr>
+          <a:xfrm>
+            <a:off x="2313432" y="3364992"/>
             <a:ext cx="1645920" cy="475488"/>
           </a:xfrm>
           <a:prstGeom prst="rect">
@@ -10202,13 +10643,13 @@
       </p:sp>
       <p:sp>
         <p:nvSpPr>
-          <p:cNvPr id="26" name="Text 24"/>
-          <p:cNvSpPr/>
-          <p:nvPr/>
-        </p:nvSpPr>
-        <p:spPr>
-          <a:xfrm>
-            <a:off x="2999232" y="3364992"/>
+          <p:cNvPr id="29" name="Text 27"/>
+          <p:cNvSpPr/>
+          <p:nvPr/>
+        </p:nvSpPr>
+        <p:spPr>
+          <a:xfrm>
+            <a:off x="2313432" y="3364992"/>
             <a:ext cx="1645920" cy="475488"/>
           </a:xfrm>
           <a:prstGeom prst="rect">
@@ -10241,14 +10682,14 @@
       </p:sp>
       <p:sp>
         <p:nvSpPr>
-          <p:cNvPr id="27" name="Text 25"/>
-          <p:cNvSpPr/>
-          <p:nvPr/>
-        </p:nvSpPr>
-        <p:spPr>
-          <a:xfrm>
-            <a:off x="4645152" y="3364992"/>
-            <a:ext cx="1097280" cy="475488"/>
+          <p:cNvPr id="30" name="Text 28"/>
+          <p:cNvSpPr/>
+          <p:nvPr/>
+        </p:nvSpPr>
+        <p:spPr>
+          <a:xfrm>
+            <a:off x="3959352" y="3364992"/>
+            <a:ext cx="411480" cy="475488"/>
           </a:xfrm>
           <a:prstGeom prst="rect">
             <a:avLst/>
@@ -10280,13 +10721,13 @@
       </p:sp>
       <p:sp>
         <p:nvSpPr>
-          <p:cNvPr id="28" name="Shape 26"/>
-          <p:cNvSpPr/>
-          <p:nvPr/>
-        </p:nvSpPr>
-        <p:spPr>
-          <a:xfrm>
-            <a:off x="5742432" y="3364992"/>
+          <p:cNvPr id="31" name="Shape 29"/>
+          <p:cNvSpPr/>
+          <p:nvPr/>
+        </p:nvSpPr>
+        <p:spPr>
+          <a:xfrm>
+            <a:off x="4370832" y="3364992"/>
             <a:ext cx="1645920" cy="475488"/>
           </a:xfrm>
           <a:prstGeom prst="rect">
@@ -10307,13 +10748,13 @@
       </p:sp>
       <p:sp>
         <p:nvSpPr>
-          <p:cNvPr id="29" name="Text 27"/>
-          <p:cNvSpPr/>
-          <p:nvPr/>
-        </p:nvSpPr>
-        <p:spPr>
-          <a:xfrm>
-            <a:off x="5742432" y="3364992"/>
+          <p:cNvPr id="32" name="Text 30"/>
+          <p:cNvSpPr/>
+          <p:nvPr/>
+        </p:nvSpPr>
+        <p:spPr>
+          <a:xfrm>
+            <a:off x="4370832" y="3364992"/>
             <a:ext cx="1645920" cy="475488"/>
           </a:xfrm>
           <a:prstGeom prst="rect">
@@ -10338,7 +10779,7 @@
                 <a:ea typeface="Trebuchet MS" pitchFamily="34" charset="-122"/>
                 <a:cs typeface="Trebuchet MS" pitchFamily="34" charset="-120"/>
               </a:rPr>
-              <a:t>ship</a:t>
+              <a:t>work</a:t>
             </a:r>
             <a:endParaRPr lang="en-US" sz="1400" dirty="0"/>
           </a:p>
@@ -10346,7 +10787,112 @@
       </p:sp>
       <p:sp>
         <p:nvSpPr>
-          <p:cNvPr id="30" name="Shape 28"/>
+          <p:cNvPr id="33" name="Text 31"/>
+          <p:cNvSpPr/>
+          <p:nvPr/>
+        </p:nvSpPr>
+        <p:spPr>
+          <a:xfrm>
+            <a:off x="6016752" y="3364992"/>
+            <a:ext cx="411480" cy="475488"/>
+          </a:xfrm>
+          <a:prstGeom prst="rect">
+            <a:avLst/>
+          </a:prstGeom>
+          <a:noFill/>
+          <a:ln/>
+        </p:spPr>
+        <p:txBody>
+          <a:bodyPr wrap="square" lIns="0" tIns="0" rIns="0" bIns="0" rtlCol="0" anchor="ctr"/>
+          <a:lstStyle/>
+          <a:p>
+            <a:pPr algn="ctr" indent="0" marL="0">
+              <a:buNone/>
+            </a:pPr>
+            <a:r>
+              <a:rPr lang="en-US" sz="1600" b="1" dirty="0">
+                <a:solidFill>
+                  <a:srgbClr val="0D9488"/>
+                </a:solidFill>
+                <a:latin typeface="Trebuchet MS" pitchFamily="34" charset="0"/>
+                <a:ea typeface="Trebuchet MS" pitchFamily="34" charset="-122"/>
+                <a:cs typeface="Trebuchet MS" pitchFamily="34" charset="-120"/>
+              </a:rPr>
+              <a:t>·</a:t>
+            </a:r>
+            <a:endParaRPr lang="en-US" sz="1600" dirty="0"/>
+          </a:p>
+        </p:txBody>
+      </p:sp>
+      <p:sp>
+        <p:nvSpPr>
+          <p:cNvPr id="34" name="Shape 32"/>
+          <p:cNvSpPr/>
+          <p:nvPr/>
+        </p:nvSpPr>
+        <p:spPr>
+          <a:xfrm>
+            <a:off x="6428232" y="3364992"/>
+            <a:ext cx="1645920" cy="475488"/>
+          </a:xfrm>
+          <a:prstGeom prst="rect">
+            <a:avLst>
+              <a:gd name="adj" fmla="val 9615"/>
+            </a:avLst>
+          </a:prstGeom>
+          <a:solidFill>
+            <a:srgbClr val="FFFFFF"/>
+          </a:solidFill>
+          <a:ln w="12700">
+            <a:solidFill>
+              <a:srgbClr val="0D9488"/>
+            </a:solidFill>
+            <a:prstDash val="solid"/>
+          </a:ln>
+        </p:spPr>
+      </p:sp>
+      <p:sp>
+        <p:nvSpPr>
+          <p:cNvPr id="35" name="Text 33"/>
+          <p:cNvSpPr/>
+          <p:nvPr/>
+        </p:nvSpPr>
+        <p:spPr>
+          <a:xfrm>
+            <a:off x="6428232" y="3364992"/>
+            <a:ext cx="1645920" cy="475488"/>
+          </a:xfrm>
+          <a:prstGeom prst="rect">
+            <a:avLst/>
+          </a:prstGeom>
+          <a:noFill/>
+          <a:ln/>
+        </p:spPr>
+        <p:txBody>
+          <a:bodyPr wrap="square" lIns="0" tIns="0" rIns="0" bIns="0" rtlCol="0" anchor="ctr"/>
+          <a:lstStyle/>
+          <a:p>
+            <a:pPr algn="ctr" indent="0" marL="0">
+              <a:buNone/>
+            </a:pPr>
+            <a:r>
+              <a:rPr lang="en-US" sz="1400" b="1" dirty="0">
+                <a:solidFill>
+                  <a:srgbClr val="0D9488"/>
+                </a:solidFill>
+                <a:latin typeface="Trebuchet MS" pitchFamily="34" charset="0"/>
+                <a:ea typeface="Trebuchet MS" pitchFamily="34" charset="-122"/>
+                <a:cs typeface="Trebuchet MS" pitchFamily="34" charset="-120"/>
+              </a:rPr>
+              <a:t>ing</a:t>
+            </a:r>
+            <a:endParaRPr lang="en-US" sz="1400" dirty="0"/>
+          </a:p>
+        </p:txBody>
+      </p:sp>
+      <p:sp>
+        <p:nvSpPr>
+          <p:cNvPr id="36" name="Shape 34"/>
           <p:cNvSpPr/>
           <p:nvPr/>
         </p:nvSpPr>
@@ -10373,7 +10919,7 @@
       </p:sp>
       <p:sp>
         <p:nvSpPr>
-          <p:cNvPr id="31" name="Text 29"/>
+          <p:cNvPr id="37" name="Text 35"/>
           <p:cNvSpPr/>
           <p:nvPr/>
         </p:nvSpPr>
@@ -10412,7 +10958,7 @@
       </p:sp>
       <p:sp>
         <p:nvSpPr>
-          <p:cNvPr id="32" name="Shape 30"/>
+          <p:cNvPr id="38" name="Shape 36"/>
           <p:cNvSpPr/>
           <p:nvPr/>
         </p:nvSpPr>
@@ -10439,13 +10985,13 @@
       </p:sp>
       <p:sp>
         <p:nvSpPr>
-          <p:cNvPr id="33" name="Shape 31"/>
-          <p:cNvSpPr/>
-          <p:nvPr/>
-        </p:nvSpPr>
-        <p:spPr>
-          <a:xfrm>
-            <a:off x="2254649" y="4169664"/>
+          <p:cNvPr id="39" name="Shape 37"/>
+          <p:cNvSpPr/>
+          <p:nvPr/>
+        </p:nvSpPr>
+        <p:spPr>
+          <a:xfrm>
+            <a:off x="2023872" y="4169664"/>
             <a:ext cx="685800" cy="475488"/>
           </a:xfrm>
           <a:prstGeom prst="rect">
@@ -10466,13 +11012,13 @@
       </p:sp>
       <p:sp>
         <p:nvSpPr>
-          <p:cNvPr id="34" name="Text 32"/>
-          <p:cNvSpPr/>
-          <p:nvPr/>
-        </p:nvSpPr>
-        <p:spPr>
-          <a:xfrm>
-            <a:off x="2254649" y="4169664"/>
+          <p:cNvPr id="40" name="Text 38"/>
+          <p:cNvSpPr/>
+          <p:nvPr/>
+        </p:nvSpPr>
+        <p:spPr>
+          <a:xfrm>
+            <a:off x="2023872" y="4169664"/>
             <a:ext cx="685800" cy="475488"/>
           </a:xfrm>
           <a:prstGeom prst="rect">
@@ -10505,13 +11051,13 @@
       </p:sp>
       <p:sp>
         <p:nvSpPr>
-          <p:cNvPr id="35" name="Shape 33"/>
-          <p:cNvSpPr/>
-          <p:nvPr/>
-        </p:nvSpPr>
-        <p:spPr>
-          <a:xfrm>
-            <a:off x="3293146" y="4169664"/>
+          <p:cNvPr id="41" name="Shape 39"/>
+          <p:cNvSpPr/>
+          <p:nvPr/>
+        </p:nvSpPr>
+        <p:spPr>
+          <a:xfrm>
+            <a:off x="2831592" y="4169664"/>
             <a:ext cx="685800" cy="475488"/>
           </a:xfrm>
           <a:prstGeom prst="rect">
@@ -10532,13 +11078,13 @@
       </p:sp>
       <p:sp>
         <p:nvSpPr>
-          <p:cNvPr id="36" name="Text 34"/>
-          <p:cNvSpPr/>
-          <p:nvPr/>
-        </p:nvSpPr>
-        <p:spPr>
-          <a:xfrm>
-            <a:off x="3293146" y="4169664"/>
+          <p:cNvPr id="42" name="Text 40"/>
+          <p:cNvSpPr/>
+          <p:nvPr/>
+        </p:nvSpPr>
+        <p:spPr>
+          <a:xfrm>
+            <a:off x="2831592" y="4169664"/>
             <a:ext cx="685800" cy="475488"/>
           </a:xfrm>
           <a:prstGeom prst="rect">
@@ -10571,13 +11117,13 @@
       </p:sp>
       <p:sp>
         <p:nvSpPr>
-          <p:cNvPr id="37" name="Shape 35"/>
-          <p:cNvSpPr/>
-          <p:nvPr/>
-        </p:nvSpPr>
-        <p:spPr>
-          <a:xfrm>
-            <a:off x="4331643" y="4169664"/>
+          <p:cNvPr id="43" name="Shape 41"/>
+          <p:cNvSpPr/>
+          <p:nvPr/>
+        </p:nvSpPr>
+        <p:spPr>
+          <a:xfrm>
+            <a:off x="3639312" y="4169664"/>
             <a:ext cx="685800" cy="475488"/>
           </a:xfrm>
           <a:prstGeom prst="rect">
@@ -10598,13 +11144,13 @@
       </p:sp>
       <p:sp>
         <p:nvSpPr>
-          <p:cNvPr id="38" name="Text 36"/>
-          <p:cNvSpPr/>
-          <p:nvPr/>
-        </p:nvSpPr>
-        <p:spPr>
-          <a:xfrm>
-            <a:off x="4331643" y="4169664"/>
+          <p:cNvPr id="44" name="Text 42"/>
+          <p:cNvSpPr/>
+          <p:nvPr/>
+        </p:nvSpPr>
+        <p:spPr>
+          <a:xfrm>
+            <a:off x="3639312" y="4169664"/>
             <a:ext cx="685800" cy="475488"/>
           </a:xfrm>
           <a:prstGeom prst="rect">
@@ -10637,13 +11183,13 @@
       </p:sp>
       <p:sp>
         <p:nvSpPr>
-          <p:cNvPr id="39" name="Shape 37"/>
-          <p:cNvSpPr/>
-          <p:nvPr/>
-        </p:nvSpPr>
-        <p:spPr>
-          <a:xfrm>
-            <a:off x="5370141" y="4169664"/>
+          <p:cNvPr id="45" name="Shape 43"/>
+          <p:cNvSpPr/>
+          <p:nvPr/>
+        </p:nvSpPr>
+        <p:spPr>
+          <a:xfrm>
+            <a:off x="4447032" y="4169664"/>
             <a:ext cx="685800" cy="475488"/>
           </a:xfrm>
           <a:prstGeom prst="rect">
@@ -10664,13 +11210,13 @@
       </p:sp>
       <p:sp>
         <p:nvSpPr>
-          <p:cNvPr id="40" name="Text 38"/>
-          <p:cNvSpPr/>
-          <p:nvPr/>
-        </p:nvSpPr>
-        <p:spPr>
-          <a:xfrm>
-            <a:off x="5370141" y="4169664"/>
+          <p:cNvPr id="46" name="Text 44"/>
+          <p:cNvSpPr/>
+          <p:nvPr/>
+        </p:nvSpPr>
+        <p:spPr>
+          <a:xfrm>
+            <a:off x="4447032" y="4169664"/>
             <a:ext cx="685800" cy="475488"/>
           </a:xfrm>
           <a:prstGeom prst="rect">
@@ -10695,7 +11241,7 @@
                 <a:ea typeface="Trebuchet MS" pitchFamily="34" charset="-122"/>
                 <a:cs typeface="Trebuchet MS" pitchFamily="34" charset="-120"/>
               </a:rPr>
-              <a:t>sh</a:t>
+              <a:t>w</a:t>
             </a:r>
             <a:endParaRPr lang="en-US" sz="900" dirty="0"/>
           </a:p>
@@ -10703,13 +11249,13 @@
       </p:sp>
       <p:sp>
         <p:nvSpPr>
-          <p:cNvPr id="41" name="Shape 39"/>
-          <p:cNvSpPr/>
-          <p:nvPr/>
-        </p:nvSpPr>
-        <p:spPr>
-          <a:xfrm>
-            <a:off x="6408638" y="4169664"/>
+          <p:cNvPr id="47" name="Shape 45"/>
+          <p:cNvSpPr/>
+          <p:nvPr/>
+        </p:nvSpPr>
+        <p:spPr>
+          <a:xfrm>
+            <a:off x="5254752" y="4169664"/>
             <a:ext cx="685800" cy="475488"/>
           </a:xfrm>
           <a:prstGeom prst="rect">
@@ -10730,13 +11276,13 @@
       </p:sp>
       <p:sp>
         <p:nvSpPr>
-          <p:cNvPr id="42" name="Text 40"/>
-          <p:cNvSpPr/>
-          <p:nvPr/>
-        </p:nvSpPr>
-        <p:spPr>
-          <a:xfrm>
-            <a:off x="6408638" y="4169664"/>
+          <p:cNvPr id="48" name="Text 46"/>
+          <p:cNvSpPr/>
+          <p:nvPr/>
+        </p:nvSpPr>
+        <p:spPr>
+          <a:xfrm>
+            <a:off x="5254752" y="4169664"/>
             <a:ext cx="685800" cy="475488"/>
           </a:xfrm>
           <a:prstGeom prst="rect">
@@ -10761,7 +11307,7 @@
                 <a:ea typeface="Trebuchet MS" pitchFamily="34" charset="-122"/>
                 <a:cs typeface="Trebuchet MS" pitchFamily="34" charset="-120"/>
               </a:rPr>
-              <a:t>i</a:t>
+              <a:t>or</a:t>
             </a:r>
             <a:endParaRPr lang="en-US" sz="900" dirty="0"/>
           </a:p>
@@ -10769,13 +11315,13 @@
       </p:sp>
       <p:sp>
         <p:nvSpPr>
-          <p:cNvPr id="43" name="Shape 41"/>
-          <p:cNvSpPr/>
-          <p:nvPr/>
-        </p:nvSpPr>
-        <p:spPr>
-          <a:xfrm>
-            <a:off x="7447135" y="4169664"/>
+          <p:cNvPr id="49" name="Shape 47"/>
+          <p:cNvSpPr/>
+          <p:nvPr/>
+        </p:nvSpPr>
+        <p:spPr>
+          <a:xfrm>
+            <a:off x="6062472" y="4169664"/>
             <a:ext cx="685800" cy="475488"/>
           </a:xfrm>
           <a:prstGeom prst="rect">
@@ -10796,13 +11342,13 @@
       </p:sp>
       <p:sp>
         <p:nvSpPr>
-          <p:cNvPr id="44" name="Text 42"/>
-          <p:cNvSpPr/>
-          <p:nvPr/>
-        </p:nvSpPr>
-        <p:spPr>
-          <a:xfrm>
-            <a:off x="7447135" y="4169664"/>
+          <p:cNvPr id="50" name="Text 48"/>
+          <p:cNvSpPr/>
+          <p:nvPr/>
+        </p:nvSpPr>
+        <p:spPr>
+          <a:xfrm>
+            <a:off x="6062472" y="4169664"/>
             <a:ext cx="685800" cy="475488"/>
           </a:xfrm>
           <a:prstGeom prst="rect">
@@ -10827,7 +11373,139 @@
                 <a:ea typeface="Trebuchet MS" pitchFamily="34" charset="-122"/>
                 <a:cs typeface="Trebuchet MS" pitchFamily="34" charset="-120"/>
               </a:rPr>
-              <a:t>p</a:t>
+              <a:t>k</a:t>
+            </a:r>
+            <a:endParaRPr lang="en-US" sz="900" dirty="0"/>
+          </a:p>
+        </p:txBody>
+      </p:sp>
+      <p:sp>
+        <p:nvSpPr>
+          <p:cNvPr id="51" name="Shape 49"/>
+          <p:cNvSpPr/>
+          <p:nvPr/>
+        </p:nvSpPr>
+        <p:spPr>
+          <a:xfrm>
+            <a:off x="6870192" y="4169664"/>
+            <a:ext cx="685800" cy="475488"/>
+          </a:xfrm>
+          <a:prstGeom prst="rect">
+            <a:avLst>
+              <a:gd name="adj" fmla="val 7692"/>
+            </a:avLst>
+          </a:prstGeom>
+          <a:solidFill>
+            <a:srgbClr val="FFFFFF"/>
+          </a:solidFill>
+          <a:ln w="12700">
+            <a:solidFill>
+              <a:srgbClr val="DB2777"/>
+            </a:solidFill>
+            <a:prstDash val="solid"/>
+          </a:ln>
+        </p:spPr>
+      </p:sp>
+      <p:sp>
+        <p:nvSpPr>
+          <p:cNvPr id="52" name="Text 50"/>
+          <p:cNvSpPr/>
+          <p:nvPr/>
+        </p:nvSpPr>
+        <p:spPr>
+          <a:xfrm>
+            <a:off x="6870192" y="4169664"/>
+            <a:ext cx="685800" cy="475488"/>
+          </a:xfrm>
+          <a:prstGeom prst="rect">
+            <a:avLst/>
+          </a:prstGeom>
+          <a:noFill/>
+          <a:ln/>
+        </p:spPr>
+        <p:txBody>
+          <a:bodyPr wrap="square" lIns="0" tIns="0" rIns="0" bIns="0" rtlCol="0" anchor="ctr"/>
+          <a:lstStyle/>
+          <a:p>
+            <a:pPr algn="ctr" indent="0" marL="0">
+              <a:buNone/>
+            </a:pPr>
+            <a:r>
+              <a:rPr lang="en-US" sz="900" b="1" dirty="0">
+                <a:solidFill>
+                  <a:srgbClr val="9D174D"/>
+                </a:solidFill>
+                <a:latin typeface="Trebuchet MS" pitchFamily="34" charset="0"/>
+                <a:ea typeface="Trebuchet MS" pitchFamily="34" charset="-122"/>
+                <a:cs typeface="Trebuchet MS" pitchFamily="34" charset="-120"/>
+              </a:rPr>
+              <a:t>i</a:t>
+            </a:r>
+            <a:endParaRPr lang="en-US" sz="900" dirty="0"/>
+          </a:p>
+        </p:txBody>
+      </p:sp>
+      <p:sp>
+        <p:nvSpPr>
+          <p:cNvPr id="53" name="Shape 51"/>
+          <p:cNvSpPr/>
+          <p:nvPr/>
+        </p:nvSpPr>
+        <p:spPr>
+          <a:xfrm>
+            <a:off x="7677912" y="4169664"/>
+            <a:ext cx="685800" cy="475488"/>
+          </a:xfrm>
+          <a:prstGeom prst="rect">
+            <a:avLst>
+              <a:gd name="adj" fmla="val 7692"/>
+            </a:avLst>
+          </a:prstGeom>
+          <a:solidFill>
+            <a:srgbClr val="FFFFFF"/>
+          </a:solidFill>
+          <a:ln w="12700">
+            <a:solidFill>
+              <a:srgbClr val="DB2777"/>
+            </a:solidFill>
+            <a:prstDash val="solid"/>
+          </a:ln>
+        </p:spPr>
+      </p:sp>
+      <p:sp>
+        <p:nvSpPr>
+          <p:cNvPr id="54" name="Text 52"/>
+          <p:cNvSpPr/>
+          <p:nvPr/>
+        </p:nvSpPr>
+        <p:spPr>
+          <a:xfrm>
+            <a:off x="7677912" y="4169664"/>
+            <a:ext cx="685800" cy="475488"/>
+          </a:xfrm>
+          <a:prstGeom prst="rect">
+            <a:avLst/>
+          </a:prstGeom>
+          <a:noFill/>
+          <a:ln/>
+        </p:spPr>
+        <p:txBody>
+          <a:bodyPr wrap="square" lIns="0" tIns="0" rIns="0" bIns="0" rtlCol="0" anchor="ctr"/>
+          <a:lstStyle/>
+          <a:p>
+            <a:pPr algn="ctr" indent="0" marL="0">
+              <a:buNone/>
+            </a:pPr>
+            <a:r>
+              <a:rPr lang="en-US" sz="900" b="1" dirty="0">
+                <a:solidFill>
+                  <a:srgbClr val="9D174D"/>
+                </a:solidFill>
+                <a:latin typeface="Trebuchet MS" pitchFamily="34" charset="0"/>
+                <a:ea typeface="Trebuchet MS" pitchFamily="34" charset="-122"/>
+                <a:cs typeface="Trebuchet MS" pitchFamily="34" charset="-120"/>
+              </a:rPr>
+              <a:t>ng</a:t>
             </a:r>
             <a:endParaRPr lang="en-US" sz="900" dirty="0"/>
           </a:p>
@@ -11119,7 +11797,7 @@
                 <a:ea typeface="Calibri" pitchFamily="34" charset="-122"/>
                 <a:cs typeface="Calibri" pitchFamily="34" charset="-120"/>
               </a:rPr>
-              <a:t>Word Labs  •  wordlabs.app  •  Root: 'hard' = firm, difficult, or strong</a:t>
+              <a:t>Word Labs  •  wordlabs.app  •  Root: 'hard' = firm, solid, difficult, tough</a:t>
             </a:r>
             <a:endParaRPr lang="en-US" sz="800" dirty="0"/>
           </a:p>
@@ -11258,7 +11936,7 @@
                 <a:ea typeface="Trebuchet MS" pitchFamily="34" charset="-122"/>
                 <a:cs typeface="Trebuchet MS" pitchFamily="34" charset="-120"/>
               </a:rPr>
-              <a:t>harden</a:t>
+              <a:t>hardest</a:t>
             </a:r>
             <a:endParaRPr lang="en-US" sz="2800" dirty="0"/>
           </a:p>
@@ -11946,7 +12624,7 @@
                 <a:ea typeface="Calibri" pitchFamily="34" charset="-122"/>
                 <a:cs typeface="Calibri" pitchFamily="34" charset="-120"/>
               </a:rPr>
-              <a:t>Word Labs  •  wordlabs.app  •  Root: 'hard' = firm, difficult, or strong</a:t>
+              <a:t>Word Labs  •  wordlabs.app  •  Root: 'hard' = firm, solid, difficult, tough</a:t>
             </a:r>
             <a:endParaRPr lang="en-US" sz="800" dirty="0"/>
           </a:p>
@@ -12085,7 +12763,7 @@
                 <a:ea typeface="Trebuchet MS" pitchFamily="34" charset="-122"/>
                 <a:cs typeface="Trebuchet MS" pitchFamily="34" charset="-120"/>
               </a:rPr>
-              <a:t>harden</a:t>
+              <a:t>hardest</a:t>
             </a:r>
             <a:endParaRPr lang="en-US" sz="2800" dirty="0"/>
           </a:p>
@@ -12263,7 +12941,7 @@
                 <a:ea typeface="Calibri" pitchFamily="34" charset="-122"/>
                 <a:cs typeface="Calibri" pitchFamily="34" charset="-120"/>
               </a:rPr>
-              <a:t>firm or solid</a:t>
+              <a:t>firm, tough, difficult</a:t>
             </a:r>
             <a:endParaRPr lang="en-US" sz="850" dirty="0"/>
           </a:p>
@@ -12336,7 +13014,7 @@
                 <a:ea typeface="Trebuchet MS" pitchFamily="34" charset="-122"/>
                 <a:cs typeface="Trebuchet MS" pitchFamily="34" charset="-120"/>
               </a:rPr>
-              <a:t>en</a:t>
+              <a:t>est</a:t>
             </a:r>
             <a:endParaRPr lang="en-US" sz="1300" dirty="0"/>
           </a:p>
@@ -12375,7 +13053,7 @@
                 <a:ea typeface="Calibri" pitchFamily="34" charset="-122"/>
                 <a:cs typeface="Calibri" pitchFamily="34" charset="-120"/>
               </a:rPr>
-              <a:t>to make or become</a:t>
+              <a:t>most (superlative)</a:t>
             </a:r>
             <a:endParaRPr lang="en-US" sz="850" dirty="0"/>
           </a:p>
@@ -12931,7 +13609,7 @@
                 <a:ea typeface="Calibri" pitchFamily="34" charset="-122"/>
                 <a:cs typeface="Calibri" pitchFamily="34" charset="-120"/>
               </a:rPr>
-              <a:t>Word Labs  •  wordlabs.app  •  Root: 'hard' = firm, difficult, or strong</a:t>
+              <a:t>Word Labs  •  wordlabs.app  •  Root: 'hard' = firm, solid, difficult, tough</a:t>
             </a:r>
             <a:endParaRPr lang="en-US" sz="800" dirty="0"/>
           </a:p>
@@ -13070,7 +13748,7 @@
                 <a:ea typeface="Trebuchet MS" pitchFamily="34" charset="-122"/>
                 <a:cs typeface="Trebuchet MS" pitchFamily="34" charset="-120"/>
               </a:rPr>
-              <a:t>harden</a:t>
+              <a:t>hardest</a:t>
             </a:r>
             <a:endParaRPr lang="en-US" sz="2800" dirty="0"/>
           </a:p>
@@ -13248,7 +13926,7 @@
                 <a:ea typeface="Calibri" pitchFamily="34" charset="-122"/>
                 <a:cs typeface="Calibri" pitchFamily="34" charset="-120"/>
               </a:rPr>
-              <a:t>firm or solid</a:t>
+              <a:t>firm, tough, difficult</a:t>
             </a:r>
             <a:endParaRPr lang="en-US" sz="850" dirty="0"/>
           </a:p>
@@ -13321,7 +13999,7 @@
                 <a:ea typeface="Trebuchet MS" pitchFamily="34" charset="-122"/>
                 <a:cs typeface="Trebuchet MS" pitchFamily="34" charset="-120"/>
               </a:rPr>
-              <a:t>en</a:t>
+              <a:t>est</a:t>
             </a:r>
             <a:endParaRPr lang="en-US" sz="1300" dirty="0"/>
           </a:p>
@@ -13360,7 +14038,7 @@
                 <a:ea typeface="Calibri" pitchFamily="34" charset="-122"/>
                 <a:cs typeface="Calibri" pitchFamily="34" charset="-120"/>
               </a:rPr>
-              <a:t>to make or become</a:t>
+              <a:t>most (superlative)</a:t>
             </a:r>
             <a:endParaRPr lang="en-US" sz="850" dirty="0"/>
           </a:p>
@@ -13624,7 +14302,7 @@
                 <a:ea typeface="Trebuchet MS" pitchFamily="34" charset="-122"/>
                 <a:cs typeface="Trebuchet MS" pitchFamily="34" charset="-120"/>
               </a:rPr>
-              <a:t>en</a:t>
+              <a:t>est</a:t>
             </a:r>
             <a:endParaRPr lang="en-US" sz="1400" dirty="0"/>
           </a:p>
@@ -13957,7 +14635,7 @@
                 <a:ea typeface="Calibri" pitchFamily="34" charset="-122"/>
                 <a:cs typeface="Calibri" pitchFamily="34" charset="-120"/>
               </a:rPr>
-              <a:t>Root 'hard' — firm, difficult, or strong</a:t>
+              <a:t>Root 'hard' — firm, solid, difficult, tough</a:t>
             </a:r>
             <a:endParaRPr lang="en-US" sz="1600" dirty="0"/>
           </a:p>
@@ -14313,7 +14991,7 @@
                 <a:ea typeface="Calibri" pitchFamily="34" charset="-122"/>
                 <a:cs typeface="Calibri" pitchFamily="34" charset="-120"/>
               </a:rPr>
-              <a:t>Word Labs  •  wordlabs.app  •  Root: 'hard' = firm, difficult, or strong</a:t>
+              <a:t>Word Labs  •  wordlabs.app  •  Root: 'hard' = firm, solid, difficult, tough</a:t>
             </a:r>
             <a:endParaRPr lang="en-US" sz="800" dirty="0"/>
           </a:p>
@@ -14452,7 +15130,7 @@
                 <a:ea typeface="Trebuchet MS" pitchFamily="34" charset="-122"/>
                 <a:cs typeface="Trebuchet MS" pitchFamily="34" charset="-120"/>
               </a:rPr>
-              <a:t>harden</a:t>
+              <a:t>hardest</a:t>
             </a:r>
             <a:endParaRPr lang="en-US" sz="2800" dirty="0"/>
           </a:p>
@@ -14630,7 +15308,7 @@
                 <a:ea typeface="Calibri" pitchFamily="34" charset="-122"/>
                 <a:cs typeface="Calibri" pitchFamily="34" charset="-120"/>
               </a:rPr>
-              <a:t>firm or solid</a:t>
+              <a:t>firm, tough, difficult</a:t>
             </a:r>
             <a:endParaRPr lang="en-US" sz="850" dirty="0"/>
           </a:p>
@@ -14703,7 +15381,7 @@
                 <a:ea typeface="Trebuchet MS" pitchFamily="34" charset="-122"/>
                 <a:cs typeface="Trebuchet MS" pitchFamily="34" charset="-120"/>
               </a:rPr>
-              <a:t>en</a:t>
+              <a:t>est</a:t>
             </a:r>
             <a:endParaRPr lang="en-US" sz="1300" dirty="0"/>
           </a:p>
@@ -14742,7 +15420,7 @@
                 <a:ea typeface="Calibri" pitchFamily="34" charset="-122"/>
                 <a:cs typeface="Calibri" pitchFamily="34" charset="-120"/>
               </a:rPr>
-              <a:t>to make or become</a:t>
+              <a:t>most (superlative)</a:t>
             </a:r>
             <a:endParaRPr lang="en-US" sz="850" dirty="0"/>
           </a:p>
@@ -15006,7 +15684,7 @@
                 <a:ea typeface="Trebuchet MS" pitchFamily="34" charset="-122"/>
                 <a:cs typeface="Trebuchet MS" pitchFamily="34" charset="-120"/>
               </a:rPr>
-              <a:t>en</a:t>
+              <a:t>est</a:t>
             </a:r>
             <a:endParaRPr lang="en-US" sz="1400" dirty="0"/>
           </a:p>
@@ -15113,7 +15791,7 @@
         </p:nvSpPr>
         <p:spPr>
           <a:xfrm>
-            <a:off x="2427732" y="4169664"/>
+            <a:off x="2254649" y="4169664"/>
             <a:ext cx="685800" cy="475488"/>
           </a:xfrm>
           <a:prstGeom prst="rect">
@@ -15140,7 +15818,7 @@
         </p:nvSpPr>
         <p:spPr>
           <a:xfrm>
-            <a:off x="2427732" y="4169664"/>
+            <a:off x="2254649" y="4169664"/>
             <a:ext cx="685800" cy="475488"/>
           </a:xfrm>
           <a:prstGeom prst="rect">
@@ -15179,7 +15857,7 @@
         </p:nvSpPr>
         <p:spPr>
           <a:xfrm>
-            <a:off x="3639312" y="4169664"/>
+            <a:off x="3293146" y="4169664"/>
             <a:ext cx="685800" cy="475488"/>
           </a:xfrm>
           <a:prstGeom prst="rect">
@@ -15206,7 +15884,7 @@
         </p:nvSpPr>
         <p:spPr>
           <a:xfrm>
-            <a:off x="3639312" y="4169664"/>
+            <a:off x="3293146" y="4169664"/>
             <a:ext cx="685800" cy="475488"/>
           </a:xfrm>
           <a:prstGeom prst="rect">
@@ -15245,7 +15923,7 @@
         </p:nvSpPr>
         <p:spPr>
           <a:xfrm>
-            <a:off x="4850892" y="4169664"/>
+            <a:off x="4331643" y="4169664"/>
             <a:ext cx="685800" cy="475488"/>
           </a:xfrm>
           <a:prstGeom prst="rect">
@@ -15272,7 +15950,7 @@
         </p:nvSpPr>
         <p:spPr>
           <a:xfrm>
-            <a:off x="4850892" y="4169664"/>
+            <a:off x="4331643" y="4169664"/>
             <a:ext cx="685800" cy="475488"/>
           </a:xfrm>
           <a:prstGeom prst="rect">
@@ -15311,7 +15989,7 @@
         </p:nvSpPr>
         <p:spPr>
           <a:xfrm>
-            <a:off x="6062472" y="4169664"/>
+            <a:off x="5370141" y="4169664"/>
             <a:ext cx="685800" cy="475488"/>
           </a:xfrm>
           <a:prstGeom prst="rect">
@@ -15338,7 +16016,7 @@
         </p:nvSpPr>
         <p:spPr>
           <a:xfrm>
-            <a:off x="6062472" y="4169664"/>
+            <a:off x="5370141" y="4169664"/>
             <a:ext cx="685800" cy="475488"/>
           </a:xfrm>
           <a:prstGeom prst="rect">
@@ -15377,7 +16055,7 @@
         </p:nvSpPr>
         <p:spPr>
           <a:xfrm>
-            <a:off x="7274052" y="4169664"/>
+            <a:off x="6408638" y="4169664"/>
             <a:ext cx="685800" cy="475488"/>
           </a:xfrm>
           <a:prstGeom prst="rect">
@@ -15404,7 +16082,7 @@
         </p:nvSpPr>
         <p:spPr>
           <a:xfrm>
-            <a:off x="7274052" y="4169664"/>
+            <a:off x="6408638" y="4169664"/>
             <a:ext cx="685800" cy="475488"/>
           </a:xfrm>
           <a:prstGeom prst="rect">
@@ -15429,7 +16107,73 @@
                 <a:ea typeface="Trebuchet MS" pitchFamily="34" charset="-122"/>
                 <a:cs typeface="Trebuchet MS" pitchFamily="34" charset="-120"/>
               </a:rPr>
-              <a:t>n</a:t>
+              <a:t>s</a:t>
+            </a:r>
+            <a:endParaRPr lang="en-US" sz="900" dirty="0"/>
+          </a:p>
+        </p:txBody>
+      </p:sp>
+      <p:sp>
+        <p:nvSpPr>
+          <p:cNvPr id="43" name="Shape 41"/>
+          <p:cNvSpPr/>
+          <p:nvPr/>
+        </p:nvSpPr>
+        <p:spPr>
+          <a:xfrm>
+            <a:off x="7447135" y="4169664"/>
+            <a:ext cx="685800" cy="475488"/>
+          </a:xfrm>
+          <a:prstGeom prst="rect">
+            <a:avLst>
+              <a:gd name="adj" fmla="val 7692"/>
+            </a:avLst>
+          </a:prstGeom>
+          <a:solidFill>
+            <a:srgbClr val="FFFFFF"/>
+          </a:solidFill>
+          <a:ln w="12700">
+            <a:solidFill>
+              <a:srgbClr val="DB2777"/>
+            </a:solidFill>
+            <a:prstDash val="solid"/>
+          </a:ln>
+        </p:spPr>
+      </p:sp>
+      <p:sp>
+        <p:nvSpPr>
+          <p:cNvPr id="44" name="Text 42"/>
+          <p:cNvSpPr/>
+          <p:nvPr/>
+        </p:nvSpPr>
+        <p:spPr>
+          <a:xfrm>
+            <a:off x="7447135" y="4169664"/>
+            <a:ext cx="685800" cy="475488"/>
+          </a:xfrm>
+          <a:prstGeom prst="rect">
+            <a:avLst/>
+          </a:prstGeom>
+          <a:noFill/>
+          <a:ln/>
+        </p:spPr>
+        <p:txBody>
+          <a:bodyPr wrap="square" lIns="0" tIns="0" rIns="0" bIns="0" rtlCol="0" anchor="ctr"/>
+          <a:lstStyle/>
+          <a:p>
+            <a:pPr algn="ctr" indent="0" marL="0">
+              <a:buNone/>
+            </a:pPr>
+            <a:r>
+              <a:rPr lang="en-US" sz="900" b="1" dirty="0">
+                <a:solidFill>
+                  <a:srgbClr val="9D174D"/>
+                </a:solidFill>
+                <a:latin typeface="Trebuchet MS" pitchFamily="34" charset="0"/>
+                <a:ea typeface="Trebuchet MS" pitchFamily="34" charset="-122"/>
+                <a:cs typeface="Trebuchet MS" pitchFamily="34" charset="-120"/>
+              </a:rPr>
+              <a:t>t</a:t>
             </a:r>
             <a:endParaRPr lang="en-US" sz="900" dirty="0"/>
           </a:p>
@@ -16003,7 +16747,7 @@
                 <a:ea typeface="Calibri" pitchFamily="34" charset="-122"/>
                 <a:cs typeface="Calibri" pitchFamily="34" charset="-120"/>
               </a:rPr>
-              <a:t>Word Labs  •  wordlabs.app  •  Root: 'hard' = firm, difficult, or strong</a:t>
+              <a:t>Word Labs  •  wordlabs.app  •  Root: 'hard' = firm, solid, difficult, tough</a:t>
             </a:r>
             <a:endParaRPr lang="en-US" sz="800" dirty="0"/>
           </a:p>
@@ -16337,7 +17081,7 @@
                 <a:ea typeface="Trebuchet MS" pitchFamily="34" charset="-122"/>
                 <a:cs typeface="Trebuchet MS" pitchFamily="34" charset="-120"/>
               </a:rPr>
-              <a:t>2</a:t>
+              <a:t>1</a:t>
             </a:r>
             <a:pPr algn="ctr" indent="0" marL="0">
               <a:buNone/>
@@ -16351,7 +17095,7 @@
                 <a:ea typeface="Trebuchet MS" pitchFamily="34" charset="-122"/>
                 <a:cs typeface="Trebuchet MS" pitchFamily="34" charset="-120"/>
               </a:rPr>
-              <a:t>  punctuation marks</a:t>
+              <a:t>  punctuation mark</a:t>
             </a:r>
             <a:endParaRPr lang="en-US" sz="2800" dirty="0"/>
           </a:p>
@@ -16643,7 +17387,7 @@
                 <a:ea typeface="Calibri" pitchFamily="34" charset="-122"/>
                 <a:cs typeface="Calibri" pitchFamily="34" charset="-120"/>
               </a:rPr>
-              <a:t>Word Labs  •  wordlabs.app  •  Root: 'hard' = firm, difficult, or strong</a:t>
+              <a:t>Word Labs  •  wordlabs.app  •  Root: 'hard' = firm, solid, difficult, tough</a:t>
             </a:r>
             <a:endParaRPr lang="en-US" sz="800" dirty="0"/>
           </a:p>
@@ -16755,7 +17499,7 @@
                 <a:ea typeface="Calibri" pitchFamily="34" charset="-122"/>
                 <a:cs typeface="Calibri" pitchFamily="34" charset="-120"/>
               </a:rPr>
-              <a:t>It was </a:t>
+              <a:t>Despite great </a:t>
             </a:r>
             <a:pPr algn="l" indent="0" marL="0">
               <a:buNone/>
@@ -16772,7 +17516,7 @@
                 <a:ea typeface="Calibri" pitchFamily="34" charset="-122"/>
                 <a:cs typeface="Calibri" pitchFamily="34" charset="-120"/>
               </a:rPr>
-              <a:t>hardly</a:t>
+              <a:t>hardship</a:t>
             </a:r>
             <a:pPr algn="l" indent="0" marL="0">
               <a:buNone/>
@@ -16786,7 +17530,7 @@
                 <a:ea typeface="Calibri" pitchFamily="34" charset="-122"/>
                 <a:cs typeface="Calibri" pitchFamily="34" charset="-120"/>
               </a:rPr>
-              <a:t> surprising that the </a:t>
+              <a:t>, the </a:t>
             </a:r>
             <a:pPr algn="l" indent="0" marL="0">
               <a:buNone/>
@@ -16817,7 +17561,7 @@
                 <a:ea typeface="Calibri" pitchFamily="34" charset="-122"/>
                 <a:cs typeface="Calibri" pitchFamily="34" charset="-120"/>
               </a:rPr>
-              <a:t> fans stayed, even though the </a:t>
+              <a:t> explorers managed to </a:t>
             </a:r>
             <a:pPr algn="l" indent="0" marL="0">
               <a:buNone/>
@@ -16834,7 +17578,7 @@
                 <a:ea typeface="Calibri" pitchFamily="34" charset="-122"/>
                 <a:cs typeface="Calibri" pitchFamily="34" charset="-120"/>
               </a:rPr>
-              <a:t>hardness</a:t>
+              <a:t>harden</a:t>
             </a:r>
             <a:pPr algn="l" indent="0" marL="0">
               <a:buNone/>
@@ -16848,7 +17592,7 @@
                 <a:ea typeface="Calibri" pitchFamily="34" charset="-122"/>
                 <a:cs typeface="Calibri" pitchFamily="34" charset="-120"/>
               </a:rPr>
-              <a:t> of the wooden seats made them uncomfortable!</a:t>
+              <a:t> their resolve and push further into the wilderness.</a:t>
             </a:r>
             <a:endParaRPr lang="en-US" sz="1800" dirty="0"/>
           </a:p>
@@ -17003,7 +17747,7 @@
                 <a:ea typeface="Trebuchet MS" pitchFamily="34" charset="-122"/>
                 <a:cs typeface="Trebuchet MS" pitchFamily="34" charset="-120"/>
               </a:rPr>
-              <a:t>hardly</a:t>
+              <a:t>hardship</a:t>
             </a:r>
             <a:endParaRPr lang="en-US" sz="1400" dirty="0"/>
           </a:p>
@@ -17259,7 +18003,7 @@
                 <a:ea typeface="Trebuchet MS" pitchFamily="34" charset="-122"/>
                 <a:cs typeface="Trebuchet MS" pitchFamily="34" charset="-120"/>
               </a:rPr>
-              <a:t>hardness</a:t>
+              <a:t>harden</a:t>
             </a:r>
             <a:endParaRPr lang="en-US" sz="1400" dirty="0"/>
           </a:p>
@@ -17590,7 +18334,7 @@
                 <a:ea typeface="Calibri" pitchFamily="34" charset="-122"/>
                 <a:cs typeface="Calibri" pitchFamily="34" charset="-120"/>
               </a:rPr>
-              <a:t>Word Labs  •  wordlabs.app  •  Root: 'hard' = firm, difficult, or strong</a:t>
+              <a:t>Word Labs  •  wordlabs.app  •  Root: 'hard' = firm, solid, difficult, tough</a:t>
             </a:r>
             <a:endParaRPr lang="en-US" sz="800" dirty="0"/>
           </a:p>
@@ -17729,7 +18473,7 @@
                 <a:ea typeface="Trebuchet MS" pitchFamily="34" charset="-122"/>
                 <a:cs typeface="Trebuchet MS" pitchFamily="34" charset="-120"/>
               </a:rPr>
-              <a:t>hardly</a:t>
+              <a:t>hardship</a:t>
             </a:r>
             <a:endParaRPr lang="en-US" sz="2800" dirty="0"/>
           </a:p>
@@ -18417,7 +19161,7 @@
                 <a:ea typeface="Calibri" pitchFamily="34" charset="-122"/>
                 <a:cs typeface="Calibri" pitchFamily="34" charset="-120"/>
               </a:rPr>
-              <a:t>Word Labs  •  wordlabs.app  •  Root: 'hard' = firm, difficult, or strong</a:t>
+              <a:t>Word Labs  •  wordlabs.app  •  Root: 'hard' = firm, solid, difficult, tough</a:t>
             </a:r>
             <a:endParaRPr lang="en-US" sz="800" dirty="0"/>
           </a:p>
@@ -18556,7 +19300,7 @@
                 <a:ea typeface="Trebuchet MS" pitchFamily="34" charset="-122"/>
                 <a:cs typeface="Trebuchet MS" pitchFamily="34" charset="-120"/>
               </a:rPr>
-              <a:t>hardly</a:t>
+              <a:t>hardship</a:t>
             </a:r>
             <a:endParaRPr lang="en-US" sz="2800" dirty="0"/>
           </a:p>
@@ -18734,7 +19478,7 @@
                 <a:ea typeface="Calibri" pitchFamily="34" charset="-122"/>
                 <a:cs typeface="Calibri" pitchFamily="34" charset="-120"/>
               </a:rPr>
-              <a:t>firm or difficult</a:t>
+              <a:t>firm, tough, difficult</a:t>
             </a:r>
             <a:endParaRPr lang="en-US" sz="850" dirty="0"/>
           </a:p>
@@ -18807,7 +19551,7 @@
                 <a:ea typeface="Trebuchet MS" pitchFamily="34" charset="-122"/>
                 <a:cs typeface="Trebuchet MS" pitchFamily="34" charset="-120"/>
               </a:rPr>
-              <a:t>ly</a:t>
+              <a:t>ship</a:t>
             </a:r>
             <a:endParaRPr lang="en-US" sz="1300" dirty="0"/>
           </a:p>
@@ -18846,7 +19590,7 @@
                 <a:ea typeface="Calibri" pitchFamily="34" charset="-122"/>
                 <a:cs typeface="Calibri" pitchFamily="34" charset="-120"/>
               </a:rPr>
-              <a:t>in a certain way</a:t>
+              <a:t>state or condition of</a:t>
             </a:r>
             <a:endParaRPr lang="en-US" sz="850" dirty="0"/>
           </a:p>
@@ -19402,7 +20146,7 @@
                 <a:ea typeface="Calibri" pitchFamily="34" charset="-122"/>
                 <a:cs typeface="Calibri" pitchFamily="34" charset="-120"/>
               </a:rPr>
-              <a:t>Word Labs  •  wordlabs.app  •  Root: 'hard' = firm, difficult, or strong</a:t>
+              <a:t>Word Labs  •  wordlabs.app  •  Root: 'hard' = firm, solid, difficult, tough</a:t>
             </a:r>
             <a:endParaRPr lang="en-US" sz="800" dirty="0"/>
           </a:p>
@@ -19541,7 +20285,7 @@
                 <a:ea typeface="Trebuchet MS" pitchFamily="34" charset="-122"/>
                 <a:cs typeface="Trebuchet MS" pitchFamily="34" charset="-120"/>
               </a:rPr>
-              <a:t>hardly</a:t>
+              <a:t>hardship</a:t>
             </a:r>
             <a:endParaRPr lang="en-US" sz="2800" dirty="0"/>
           </a:p>
@@ -19719,7 +20463,7 @@
                 <a:ea typeface="Calibri" pitchFamily="34" charset="-122"/>
                 <a:cs typeface="Calibri" pitchFamily="34" charset="-120"/>
               </a:rPr>
-              <a:t>firm or difficult</a:t>
+              <a:t>firm, tough, difficult</a:t>
             </a:r>
             <a:endParaRPr lang="en-US" sz="850" dirty="0"/>
           </a:p>
@@ -19792,7 +20536,7 @@
                 <a:ea typeface="Trebuchet MS" pitchFamily="34" charset="-122"/>
                 <a:cs typeface="Trebuchet MS" pitchFamily="34" charset="-120"/>
               </a:rPr>
-              <a:t>ly</a:t>
+              <a:t>ship</a:t>
             </a:r>
             <a:endParaRPr lang="en-US" sz="1300" dirty="0"/>
           </a:p>
@@ -19831,7 +20575,7 @@
                 <a:ea typeface="Calibri" pitchFamily="34" charset="-122"/>
                 <a:cs typeface="Calibri" pitchFamily="34" charset="-120"/>
               </a:rPr>
-              <a:t>in a certain way</a:t>
+              <a:t>state or condition of</a:t>
             </a:r>
             <a:endParaRPr lang="en-US" sz="850" dirty="0"/>
           </a:p>
@@ -20095,7 +20839,7 @@
                 <a:ea typeface="Trebuchet MS" pitchFamily="34" charset="-122"/>
                 <a:cs typeface="Trebuchet MS" pitchFamily="34" charset="-120"/>
               </a:rPr>
-              <a:t>ly</a:t>
+              <a:t>ship</a:t>
             </a:r>
             <a:endParaRPr lang="en-US" sz="1400" dirty="0"/>
           </a:p>
@@ -20519,7 +21263,7 @@
                 <a:ea typeface="Calibri" pitchFamily="34" charset="-122"/>
                 <a:cs typeface="Calibri" pitchFamily="34" charset="-120"/>
               </a:rPr>
-              <a:t>Word Labs  •  wordlabs.app  •  Root: 'hard' = firm, difficult, or strong</a:t>
+              <a:t>Word Labs  •  wordlabs.app  •  Root: 'hard' = firm, solid, difficult, tough</a:t>
             </a:r>
             <a:endParaRPr lang="en-US" sz="800" dirty="0"/>
           </a:p>
@@ -20658,7 +21402,7 @@
                 <a:ea typeface="Trebuchet MS" pitchFamily="34" charset="-122"/>
                 <a:cs typeface="Trebuchet MS" pitchFamily="34" charset="-120"/>
               </a:rPr>
-              <a:t>hardly</a:t>
+              <a:t>hardship</a:t>
             </a:r>
             <a:endParaRPr lang="en-US" sz="2800" dirty="0"/>
           </a:p>
@@ -20836,7 +21580,7 @@
                 <a:ea typeface="Calibri" pitchFamily="34" charset="-122"/>
                 <a:cs typeface="Calibri" pitchFamily="34" charset="-120"/>
               </a:rPr>
-              <a:t>firm or difficult</a:t>
+              <a:t>firm, tough, difficult</a:t>
             </a:r>
             <a:endParaRPr lang="en-US" sz="850" dirty="0"/>
           </a:p>
@@ -20909,7 +21653,7 @@
                 <a:ea typeface="Trebuchet MS" pitchFamily="34" charset="-122"/>
                 <a:cs typeface="Trebuchet MS" pitchFamily="34" charset="-120"/>
               </a:rPr>
-              <a:t>ly</a:t>
+              <a:t>ship</a:t>
             </a:r>
             <a:endParaRPr lang="en-US" sz="1300" dirty="0"/>
           </a:p>
@@ -20948,7 +21692,7 @@
                 <a:ea typeface="Calibri" pitchFamily="34" charset="-122"/>
                 <a:cs typeface="Calibri" pitchFamily="34" charset="-120"/>
               </a:rPr>
-              <a:t>in a certain way</a:t>
+              <a:t>state or condition of</a:t>
             </a:r>
             <a:endParaRPr lang="en-US" sz="850" dirty="0"/>
           </a:p>
@@ -21212,7 +21956,7 @@
                 <a:ea typeface="Trebuchet MS" pitchFamily="34" charset="-122"/>
                 <a:cs typeface="Trebuchet MS" pitchFamily="34" charset="-120"/>
               </a:rPr>
-              <a:t>ly</a:t>
+              <a:t>ship</a:t>
             </a:r>
             <a:endParaRPr lang="en-US" sz="1400" dirty="0"/>
           </a:p>
@@ -21319,7 +22063,7 @@
         </p:nvSpPr>
         <p:spPr>
           <a:xfrm>
-            <a:off x="2427732" y="4169664"/>
+            <a:off x="2254649" y="4169664"/>
             <a:ext cx="685800" cy="475488"/>
           </a:xfrm>
           <a:prstGeom prst="rect">
@@ -21346,7 +22090,7 @@
         </p:nvSpPr>
         <p:spPr>
           <a:xfrm>
-            <a:off x="2427732" y="4169664"/>
+            <a:off x="2254649" y="4169664"/>
             <a:ext cx="685800" cy="475488"/>
           </a:xfrm>
           <a:prstGeom prst="rect">
@@ -21385,7 +22129,7 @@
         </p:nvSpPr>
         <p:spPr>
           <a:xfrm>
-            <a:off x="3639312" y="4169664"/>
+            <a:off x="3293146" y="4169664"/>
             <a:ext cx="685800" cy="475488"/>
           </a:xfrm>
           <a:prstGeom prst="rect">
@@ -21412,7 +22156,7 @@
         </p:nvSpPr>
         <p:spPr>
           <a:xfrm>
-            <a:off x="3639312" y="4169664"/>
+            <a:off x="3293146" y="4169664"/>
             <a:ext cx="685800" cy="475488"/>
           </a:xfrm>
           <a:prstGeom prst="rect">
@@ -21451,7 +22195,7 @@
         </p:nvSpPr>
         <p:spPr>
           <a:xfrm>
-            <a:off x="4850892" y="4169664"/>
+            <a:off x="4331643" y="4169664"/>
             <a:ext cx="685800" cy="475488"/>
           </a:xfrm>
           <a:prstGeom prst="rect">
@@ -21478,7 +22222,7 @@
         </p:nvSpPr>
         <p:spPr>
           <a:xfrm>
-            <a:off x="4850892" y="4169664"/>
+            <a:off x="4331643" y="4169664"/>
             <a:ext cx="685800" cy="475488"/>
           </a:xfrm>
           <a:prstGeom prst="rect">
@@ -21517,7 +22261,7 @@
         </p:nvSpPr>
         <p:spPr>
           <a:xfrm>
-            <a:off x="6062472" y="4169664"/>
+            <a:off x="5370141" y="4169664"/>
             <a:ext cx="685800" cy="475488"/>
           </a:xfrm>
           <a:prstGeom prst="rect">
@@ -21544,7 +22288,7 @@
         </p:nvSpPr>
         <p:spPr>
           <a:xfrm>
-            <a:off x="6062472" y="4169664"/>
+            <a:off x="5370141" y="4169664"/>
             <a:ext cx="685800" cy="475488"/>
           </a:xfrm>
           <a:prstGeom prst="rect">
@@ -21569,7 +22313,7 @@
                 <a:ea typeface="Trebuchet MS" pitchFamily="34" charset="-122"/>
                 <a:cs typeface="Trebuchet MS" pitchFamily="34" charset="-120"/>
               </a:rPr>
-              <a:t>l</a:t>
+              <a:t>sh</a:t>
             </a:r>
             <a:endParaRPr lang="en-US" sz="900" dirty="0"/>
           </a:p>
@@ -21583,7 +22327,7 @@
         </p:nvSpPr>
         <p:spPr>
           <a:xfrm>
-            <a:off x="7274052" y="4169664"/>
+            <a:off x="6408638" y="4169664"/>
             <a:ext cx="685800" cy="475488"/>
           </a:xfrm>
           <a:prstGeom prst="rect">
@@ -21610,7 +22354,7 @@
         </p:nvSpPr>
         <p:spPr>
           <a:xfrm>
-            <a:off x="7274052" y="4169664"/>
+            <a:off x="6408638" y="4169664"/>
             <a:ext cx="685800" cy="475488"/>
           </a:xfrm>
           <a:prstGeom prst="rect">
@@ -21635,7 +22379,73 @@
                 <a:ea typeface="Trebuchet MS" pitchFamily="34" charset="-122"/>
                 <a:cs typeface="Trebuchet MS" pitchFamily="34" charset="-120"/>
               </a:rPr>
-              <a:t>ee</a:t>
+              <a:t>i</a:t>
+            </a:r>
+            <a:endParaRPr lang="en-US" sz="900" dirty="0"/>
+          </a:p>
+        </p:txBody>
+      </p:sp>
+      <p:sp>
+        <p:nvSpPr>
+          <p:cNvPr id="43" name="Shape 41"/>
+          <p:cNvSpPr/>
+          <p:nvPr/>
+        </p:nvSpPr>
+        <p:spPr>
+          <a:xfrm>
+            <a:off x="7447135" y="4169664"/>
+            <a:ext cx="685800" cy="475488"/>
+          </a:xfrm>
+          <a:prstGeom prst="rect">
+            <a:avLst>
+              <a:gd name="adj" fmla="val 7692"/>
+            </a:avLst>
+          </a:prstGeom>
+          <a:solidFill>
+            <a:srgbClr val="FFFFFF"/>
+          </a:solidFill>
+          <a:ln w="12700">
+            <a:solidFill>
+              <a:srgbClr val="DB2777"/>
+            </a:solidFill>
+            <a:prstDash val="solid"/>
+          </a:ln>
+        </p:spPr>
+      </p:sp>
+      <p:sp>
+        <p:nvSpPr>
+          <p:cNvPr id="44" name="Text 42"/>
+          <p:cNvSpPr/>
+          <p:nvPr/>
+        </p:nvSpPr>
+        <p:spPr>
+          <a:xfrm>
+            <a:off x="7447135" y="4169664"/>
+            <a:ext cx="685800" cy="475488"/>
+          </a:xfrm>
+          <a:prstGeom prst="rect">
+            <a:avLst/>
+          </a:prstGeom>
+          <a:noFill/>
+          <a:ln/>
+        </p:spPr>
+        <p:txBody>
+          <a:bodyPr wrap="square" lIns="0" tIns="0" rIns="0" bIns="0" rtlCol="0" anchor="ctr"/>
+          <a:lstStyle/>
+          <a:p>
+            <a:pPr algn="ctr" indent="0" marL="0">
+              <a:buNone/>
+            </a:pPr>
+            <a:r>
+              <a:rPr lang="en-US" sz="900" b="1" dirty="0">
+                <a:solidFill>
+                  <a:srgbClr val="9D174D"/>
+                </a:solidFill>
+                <a:latin typeface="Trebuchet MS" pitchFamily="34" charset="0"/>
+                <a:ea typeface="Trebuchet MS" pitchFamily="34" charset="-122"/>
+                <a:cs typeface="Trebuchet MS" pitchFamily="34" charset="-120"/>
+              </a:rPr>
+              <a:t>p</a:t>
             </a:r>
             <a:endParaRPr lang="en-US" sz="900" dirty="0"/>
           </a:p>
@@ -21927,7 +22737,7 @@
                 <a:ea typeface="Calibri" pitchFamily="34" charset="-122"/>
                 <a:cs typeface="Calibri" pitchFamily="34" charset="-120"/>
               </a:rPr>
-              <a:t>Word Labs  •  wordlabs.app  •  Root: 'hard' = firm, difficult, or strong</a:t>
+              <a:t>Word Labs  •  wordlabs.app  •  Root: 'hard' = firm, solid, difficult, tough</a:t>
             </a:r>
             <a:endParaRPr lang="en-US" sz="800" dirty="0"/>
           </a:p>
@@ -22754,7 +23564,7 @@
                 <a:ea typeface="Calibri" pitchFamily="34" charset="-122"/>
                 <a:cs typeface="Calibri" pitchFamily="34" charset="-120"/>
               </a:rPr>
-              <a:t>Word Labs  •  wordlabs.app  •  Root: 'hard' = firm, difficult, or strong</a:t>
+              <a:t>Word Labs  •  wordlabs.app  •  Root: 'hard' = firm, solid, difficult, tough</a:t>
             </a:r>
             <a:endParaRPr lang="en-US" sz="800" dirty="0"/>
           </a:p>
@@ -23071,7 +23881,7 @@
                 <a:ea typeface="Calibri" pitchFamily="34" charset="-122"/>
                 <a:cs typeface="Calibri" pitchFamily="34" charset="-120"/>
               </a:rPr>
-              <a:t>to stop living; persist to the end</a:t>
+              <a:t>to stop or fade away</a:t>
             </a:r>
             <a:endParaRPr lang="en-US" sz="850" dirty="0"/>
           </a:p>
@@ -23183,7 +23993,7 @@
                 <a:ea typeface="Calibri" pitchFamily="34" charset="-122"/>
                 <a:cs typeface="Calibri" pitchFamily="34" charset="-120"/>
               </a:rPr>
-              <a:t>firm, unyielding</a:t>
+              <a:t>firm, tough, difficult</a:t>
             </a:r>
             <a:endParaRPr lang="en-US" sz="850" dirty="0"/>
           </a:p>
@@ -23739,7 +24549,7 @@
                 <a:ea typeface="Calibri" pitchFamily="34" charset="-122"/>
                 <a:cs typeface="Calibri" pitchFamily="34" charset="-120"/>
               </a:rPr>
-              <a:t>Word Labs  •  wordlabs.app  •  Root: 'hard' = firm, difficult, or strong</a:t>
+              <a:t>Word Labs  •  wordlabs.app  •  Root: 'hard' = firm, solid, difficult, tough</a:t>
             </a:r>
             <a:endParaRPr lang="en-US" sz="800" dirty="0"/>
           </a:p>
@@ -23812,7 +24622,7 @@
                 <a:ea typeface="Trebuchet MS" pitchFamily="34" charset="-122"/>
                 <a:cs typeface="Trebuchet MS" pitchFamily="34" charset="-120"/>
               </a:rPr>
-              <a:t>We are learning that the root 'hard' means 'firm, difficult, or strong'.</a:t>
+              <a:t>We are learning that the root 'hard' means 'firm, solid, difficult, tough'.</a:t>
             </a:r>
             <a:endParaRPr lang="en-US" sz="2000" dirty="0"/>
           </a:p>
@@ -24458,7 +25268,7 @@
                 <a:ea typeface="Calibri" pitchFamily="34" charset="-122"/>
                 <a:cs typeface="Calibri" pitchFamily="34" charset="-120"/>
               </a:rPr>
-              <a:t>Word Labs  •  wordlabs.app  •  Root: 'hard' = firm, difficult, or strong</a:t>
+              <a:t>Word Labs  •  wordlabs.app  •  Root: 'hard' = firm, solid, difficult, tough</a:t>
             </a:r>
             <a:endParaRPr lang="en-US" sz="800" dirty="0"/>
           </a:p>
@@ -24775,7 +25585,7 @@
                 <a:ea typeface="Calibri" pitchFamily="34" charset="-122"/>
                 <a:cs typeface="Calibri" pitchFamily="34" charset="-120"/>
               </a:rPr>
-              <a:t>to stop living; persist to the end</a:t>
+              <a:t>to stop or fade away</a:t>
             </a:r>
             <a:endParaRPr lang="en-US" sz="850" dirty="0"/>
           </a:p>
@@ -24887,7 +25697,7 @@
                 <a:ea typeface="Calibri" pitchFamily="34" charset="-122"/>
                 <a:cs typeface="Calibri" pitchFamily="34" charset="-120"/>
               </a:rPr>
-              <a:t>firm, unyielding</a:t>
+              <a:t>firm, tough, difficult</a:t>
             </a:r>
             <a:endParaRPr lang="en-US" sz="850" dirty="0"/>
           </a:p>
@@ -25575,7 +26385,7 @@
                 <a:ea typeface="Calibri" pitchFamily="34" charset="-122"/>
                 <a:cs typeface="Calibri" pitchFamily="34" charset="-120"/>
               </a:rPr>
-              <a:t>Word Labs  •  wordlabs.app  •  Root: 'hard' = firm, difficult, or strong</a:t>
+              <a:t>Word Labs  •  wordlabs.app  •  Root: 'hard' = firm, solid, difficult, tough</a:t>
             </a:r>
             <a:endParaRPr lang="en-US" sz="800" dirty="0"/>
           </a:p>
@@ -25892,7 +26702,7 @@
                 <a:ea typeface="Calibri" pitchFamily="34" charset="-122"/>
                 <a:cs typeface="Calibri" pitchFamily="34" charset="-120"/>
               </a:rPr>
-              <a:t>to stop living; persist to the end</a:t>
+              <a:t>to stop or fade away</a:t>
             </a:r>
             <a:endParaRPr lang="en-US" sz="850" dirty="0"/>
           </a:p>
@@ -26004,7 +26814,7 @@
                 <a:ea typeface="Calibri" pitchFamily="34" charset="-122"/>
                 <a:cs typeface="Calibri" pitchFamily="34" charset="-120"/>
               </a:rPr>
-              <a:t>firm, unyielding</a:t>
+              <a:t>firm, tough, difficult</a:t>
             </a:r>
             <a:endParaRPr lang="en-US" sz="850" dirty="0"/>
           </a:p>
@@ -26983,7 +27793,7 @@
                 <a:ea typeface="Calibri" pitchFamily="34" charset="-122"/>
                 <a:cs typeface="Calibri" pitchFamily="34" charset="-120"/>
               </a:rPr>
-              <a:t>Word Labs  •  wordlabs.app  •  Root: 'hard' = firm, difficult, or strong</a:t>
+              <a:t>Word Labs  •  wordlabs.app  •  Root: 'hard' = firm, solid, difficult, tough</a:t>
             </a:r>
             <a:endParaRPr lang="en-US" sz="800" dirty="0"/>
           </a:p>
@@ -27122,7 +27932,7 @@
                 <a:ea typeface="Trebuchet MS" pitchFamily="34" charset="-122"/>
                 <a:cs typeface="Trebuchet MS" pitchFamily="34" charset="-120"/>
               </a:rPr>
-              <a:t>hardness</a:t>
+              <a:t>harden</a:t>
             </a:r>
             <a:endParaRPr lang="en-US" sz="2800" dirty="0"/>
           </a:p>
@@ -27810,7 +28620,7 @@
                 <a:ea typeface="Calibri" pitchFamily="34" charset="-122"/>
                 <a:cs typeface="Calibri" pitchFamily="34" charset="-120"/>
               </a:rPr>
-              <a:t>Word Labs  •  wordlabs.app  •  Root: 'hard' = firm, difficult, or strong</a:t>
+              <a:t>Word Labs  •  wordlabs.app  •  Root: 'hard' = firm, solid, difficult, tough</a:t>
             </a:r>
             <a:endParaRPr lang="en-US" sz="800" dirty="0"/>
           </a:p>
@@ -27949,7 +28759,7 @@
                 <a:ea typeface="Trebuchet MS" pitchFamily="34" charset="-122"/>
                 <a:cs typeface="Trebuchet MS" pitchFamily="34" charset="-120"/>
               </a:rPr>
-              <a:t>hardness</a:t>
+              <a:t>harden</a:t>
             </a:r>
             <a:endParaRPr lang="en-US" sz="2800" dirty="0"/>
           </a:p>
@@ -28127,7 +28937,7 @@
                 <a:ea typeface="Calibri" pitchFamily="34" charset="-122"/>
                 <a:cs typeface="Calibri" pitchFamily="34" charset="-120"/>
               </a:rPr>
-              <a:t>firm or solid</a:t>
+              <a:t>firm, tough, difficult</a:t>
             </a:r>
             <a:endParaRPr lang="en-US" sz="850" dirty="0"/>
           </a:p>
@@ -28200,7 +29010,7 @@
                 <a:ea typeface="Trebuchet MS" pitchFamily="34" charset="-122"/>
                 <a:cs typeface="Trebuchet MS" pitchFamily="34" charset="-120"/>
               </a:rPr>
-              <a:t>ness</a:t>
+              <a:t>en</a:t>
             </a:r>
             <a:endParaRPr lang="en-US" sz="1300" dirty="0"/>
           </a:p>
@@ -28239,7 +29049,7 @@
                 <a:ea typeface="Calibri" pitchFamily="34" charset="-122"/>
                 <a:cs typeface="Calibri" pitchFamily="34" charset="-120"/>
               </a:rPr>
-              <a:t>the quality or state of</a:t>
+              <a:t>to make or become</a:t>
             </a:r>
             <a:endParaRPr lang="en-US" sz="850" dirty="0"/>
           </a:p>
@@ -28795,7 +29605,7 @@
                 <a:ea typeface="Calibri" pitchFamily="34" charset="-122"/>
                 <a:cs typeface="Calibri" pitchFamily="34" charset="-120"/>
               </a:rPr>
-              <a:t>Word Labs  •  wordlabs.app  •  Root: 'hard' = firm, difficult, or strong</a:t>
+              <a:t>Word Labs  •  wordlabs.app  •  Root: 'hard' = firm, solid, difficult, tough</a:t>
             </a:r>
             <a:endParaRPr lang="en-US" sz="800" dirty="0"/>
           </a:p>
@@ -28934,7 +29744,7 @@
                 <a:ea typeface="Trebuchet MS" pitchFamily="34" charset="-122"/>
                 <a:cs typeface="Trebuchet MS" pitchFamily="34" charset="-120"/>
               </a:rPr>
-              <a:t>hardness</a:t>
+              <a:t>harden</a:t>
             </a:r>
             <a:endParaRPr lang="en-US" sz="2800" dirty="0"/>
           </a:p>
@@ -29112,7 +29922,7 @@
                 <a:ea typeface="Calibri" pitchFamily="34" charset="-122"/>
                 <a:cs typeface="Calibri" pitchFamily="34" charset="-120"/>
               </a:rPr>
-              <a:t>firm or solid</a:t>
+              <a:t>firm, tough, difficult</a:t>
             </a:r>
             <a:endParaRPr lang="en-US" sz="850" dirty="0"/>
           </a:p>
@@ -29185,7 +29995,7 @@
                 <a:ea typeface="Trebuchet MS" pitchFamily="34" charset="-122"/>
                 <a:cs typeface="Trebuchet MS" pitchFamily="34" charset="-120"/>
               </a:rPr>
-              <a:t>ness</a:t>
+              <a:t>en</a:t>
             </a:r>
             <a:endParaRPr lang="en-US" sz="1300" dirty="0"/>
           </a:p>
@@ -29224,7 +30034,7 @@
                 <a:ea typeface="Calibri" pitchFamily="34" charset="-122"/>
                 <a:cs typeface="Calibri" pitchFamily="34" charset="-120"/>
               </a:rPr>
-              <a:t>the quality or state of</a:t>
+              <a:t>to make or become</a:t>
             </a:r>
             <a:endParaRPr lang="en-US" sz="850" dirty="0"/>
           </a:p>
@@ -29488,7 +30298,7 @@
                 <a:ea typeface="Trebuchet MS" pitchFamily="34" charset="-122"/>
                 <a:cs typeface="Trebuchet MS" pitchFamily="34" charset="-120"/>
               </a:rPr>
-              <a:t>ness</a:t>
+              <a:t>en</a:t>
             </a:r>
             <a:endParaRPr lang="en-US" sz="1400" dirty="0"/>
           </a:p>
@@ -29912,7 +30722,7 @@
                 <a:ea typeface="Calibri" pitchFamily="34" charset="-122"/>
                 <a:cs typeface="Calibri" pitchFamily="34" charset="-120"/>
               </a:rPr>
-              <a:t>Word Labs  •  wordlabs.app  •  Root: 'hard' = firm, difficult, or strong</a:t>
+              <a:t>Word Labs  •  wordlabs.app  •  Root: 'hard' = firm, solid, difficult, tough</a:t>
             </a:r>
             <a:endParaRPr lang="en-US" sz="800" dirty="0"/>
           </a:p>
@@ -30051,7 +30861,7 @@
                 <a:ea typeface="Trebuchet MS" pitchFamily="34" charset="-122"/>
                 <a:cs typeface="Trebuchet MS" pitchFamily="34" charset="-120"/>
               </a:rPr>
-              <a:t>hardness</a:t>
+              <a:t>harden</a:t>
             </a:r>
             <a:endParaRPr lang="en-US" sz="2800" dirty="0"/>
           </a:p>
@@ -30229,7 +31039,7 @@
                 <a:ea typeface="Calibri" pitchFamily="34" charset="-122"/>
                 <a:cs typeface="Calibri" pitchFamily="34" charset="-120"/>
               </a:rPr>
-              <a:t>firm or solid</a:t>
+              <a:t>firm, tough, difficult</a:t>
             </a:r>
             <a:endParaRPr lang="en-US" sz="850" dirty="0"/>
           </a:p>
@@ -30302,7 +31112,7 @@
                 <a:ea typeface="Trebuchet MS" pitchFamily="34" charset="-122"/>
                 <a:cs typeface="Trebuchet MS" pitchFamily="34" charset="-120"/>
               </a:rPr>
-              <a:t>ness</a:t>
+              <a:t>en</a:t>
             </a:r>
             <a:endParaRPr lang="en-US" sz="1300" dirty="0"/>
           </a:p>
@@ -30341,7 +31151,7 @@
                 <a:ea typeface="Calibri" pitchFamily="34" charset="-122"/>
                 <a:cs typeface="Calibri" pitchFamily="34" charset="-120"/>
               </a:rPr>
-              <a:t>the quality or state of</a:t>
+              <a:t>to make or become</a:t>
             </a:r>
             <a:endParaRPr lang="en-US" sz="850" dirty="0"/>
           </a:p>
@@ -30605,7 +31415,7 @@
                 <a:ea typeface="Trebuchet MS" pitchFamily="34" charset="-122"/>
                 <a:cs typeface="Trebuchet MS" pitchFamily="34" charset="-120"/>
               </a:rPr>
-              <a:t>ness</a:t>
+              <a:t>en</a:t>
             </a:r>
             <a:endParaRPr lang="en-US" sz="1400" dirty="0"/>
           </a:p>
@@ -30712,7 +31522,7 @@
         </p:nvSpPr>
         <p:spPr>
           <a:xfrm>
-            <a:off x="2254649" y="4169664"/>
+            <a:off x="2427732" y="4169664"/>
             <a:ext cx="685800" cy="475488"/>
           </a:xfrm>
           <a:prstGeom prst="rect">
@@ -30739,7 +31549,7 @@
         </p:nvSpPr>
         <p:spPr>
           <a:xfrm>
-            <a:off x="2254649" y="4169664"/>
+            <a:off x="2427732" y="4169664"/>
             <a:ext cx="685800" cy="475488"/>
           </a:xfrm>
           <a:prstGeom prst="rect">
@@ -30778,7 +31588,7 @@
         </p:nvSpPr>
         <p:spPr>
           <a:xfrm>
-            <a:off x="3293146" y="4169664"/>
+            <a:off x="3639312" y="4169664"/>
             <a:ext cx="685800" cy="475488"/>
           </a:xfrm>
           <a:prstGeom prst="rect">
@@ -30805,7 +31615,7 @@
         </p:nvSpPr>
         <p:spPr>
           <a:xfrm>
-            <a:off x="3293146" y="4169664"/>
+            <a:off x="3639312" y="4169664"/>
             <a:ext cx="685800" cy="475488"/>
           </a:xfrm>
           <a:prstGeom prst="rect">
@@ -30844,7 +31654,7 @@
         </p:nvSpPr>
         <p:spPr>
           <a:xfrm>
-            <a:off x="4331643" y="4169664"/>
+            <a:off x="4850892" y="4169664"/>
             <a:ext cx="685800" cy="475488"/>
           </a:xfrm>
           <a:prstGeom prst="rect">
@@ -30871,7 +31681,7 @@
         </p:nvSpPr>
         <p:spPr>
           <a:xfrm>
-            <a:off x="4331643" y="4169664"/>
+            <a:off x="4850892" y="4169664"/>
             <a:ext cx="685800" cy="475488"/>
           </a:xfrm>
           <a:prstGeom prst="rect">
@@ -30910,7 +31720,7 @@
         </p:nvSpPr>
         <p:spPr>
           <a:xfrm>
-            <a:off x="5370141" y="4169664"/>
+            <a:off x="6062472" y="4169664"/>
             <a:ext cx="685800" cy="475488"/>
           </a:xfrm>
           <a:prstGeom prst="rect">
@@ -30937,7 +31747,7 @@
         </p:nvSpPr>
         <p:spPr>
           <a:xfrm>
-            <a:off x="5370141" y="4169664"/>
+            <a:off x="6062472" y="4169664"/>
             <a:ext cx="685800" cy="475488"/>
           </a:xfrm>
           <a:prstGeom prst="rect">
@@ -30962,7 +31772,7 @@
                 <a:ea typeface="Trebuchet MS" pitchFamily="34" charset="-122"/>
                 <a:cs typeface="Trebuchet MS" pitchFamily="34" charset="-120"/>
               </a:rPr>
-              <a:t>n</a:t>
+              <a:t>e</a:t>
             </a:r>
             <a:endParaRPr lang="en-US" sz="900" dirty="0"/>
           </a:p>
@@ -30976,7 +31786,7 @@
         </p:nvSpPr>
         <p:spPr>
           <a:xfrm>
-            <a:off x="6408638" y="4169664"/>
+            <a:off x="7274052" y="4169664"/>
             <a:ext cx="685800" cy="475488"/>
           </a:xfrm>
           <a:prstGeom prst="rect">
@@ -31003,7 +31813,7 @@
         </p:nvSpPr>
         <p:spPr>
           <a:xfrm>
-            <a:off x="6408638" y="4169664"/>
+            <a:off x="7274052" y="4169664"/>
             <a:ext cx="685800" cy="475488"/>
           </a:xfrm>
           <a:prstGeom prst="rect">
@@ -31028,73 +31838,7 @@
                 <a:ea typeface="Trebuchet MS" pitchFamily="34" charset="-122"/>
                 <a:cs typeface="Trebuchet MS" pitchFamily="34" charset="-120"/>
               </a:rPr>
-              <a:t>e</a:t>
-            </a:r>
-            <a:endParaRPr lang="en-US" sz="900" dirty="0"/>
-          </a:p>
-        </p:txBody>
-      </p:sp>
-      <p:sp>
-        <p:nvSpPr>
-          <p:cNvPr id="43" name="Shape 41"/>
-          <p:cNvSpPr/>
-          <p:nvPr/>
-        </p:nvSpPr>
-        <p:spPr>
-          <a:xfrm>
-            <a:off x="7447135" y="4169664"/>
-            <a:ext cx="685800" cy="475488"/>
-          </a:xfrm>
-          <a:prstGeom prst="rect">
-            <a:avLst>
-              <a:gd name="adj" fmla="val 7692"/>
-            </a:avLst>
-          </a:prstGeom>
-          <a:solidFill>
-            <a:srgbClr val="FFFFFF"/>
-          </a:solidFill>
-          <a:ln w="12700">
-            <a:solidFill>
-              <a:srgbClr val="DB2777"/>
-            </a:solidFill>
-            <a:prstDash val="solid"/>
-          </a:ln>
-        </p:spPr>
-      </p:sp>
-      <p:sp>
-        <p:nvSpPr>
-          <p:cNvPr id="44" name="Text 42"/>
-          <p:cNvSpPr/>
-          <p:nvPr/>
-        </p:nvSpPr>
-        <p:spPr>
-          <a:xfrm>
-            <a:off x="7447135" y="4169664"/>
-            <a:ext cx="685800" cy="475488"/>
-          </a:xfrm>
-          <a:prstGeom prst="rect">
-            <a:avLst/>
-          </a:prstGeom>
-          <a:noFill/>
-          <a:ln/>
-        </p:spPr>
-        <p:txBody>
-          <a:bodyPr wrap="square" lIns="0" tIns="0" rIns="0" bIns="0" rtlCol="0" anchor="ctr"/>
-          <a:lstStyle/>
-          <a:p>
-            <a:pPr algn="ctr" indent="0" marL="0">
-              <a:buNone/>
-            </a:pPr>
-            <a:r>
-              <a:rPr lang="en-US" sz="900" b="1" dirty="0">
-                <a:solidFill>
-                  <a:srgbClr val="9D174D"/>
-                </a:solidFill>
-                <a:latin typeface="Trebuchet MS" pitchFamily="34" charset="0"/>
-                <a:ea typeface="Trebuchet MS" pitchFamily="34" charset="-122"/>
-                <a:cs typeface="Trebuchet MS" pitchFamily="34" charset="-120"/>
-              </a:rPr>
-              <a:t>ss</a:t>
+              <a:t>n</a:t>
             </a:r>
             <a:endParaRPr lang="en-US" sz="900" dirty="0"/>
           </a:p>
@@ -31386,7 +32130,7 @@
                 <a:ea typeface="Calibri" pitchFamily="34" charset="-122"/>
                 <a:cs typeface="Calibri" pitchFamily="34" charset="-120"/>
               </a:rPr>
-              <a:t>Word Labs  •  wordlabs.app  •  Root: 'hard' = firm, difficult, or strong</a:t>
+              <a:t>Word Labs  •  wordlabs.app  •  Root: 'hard' = firm, solid, difficult, tough</a:t>
             </a:r>
             <a:endParaRPr lang="en-US" sz="800" dirty="0"/>
           </a:p>
@@ -32555,7 +33299,7 @@
                 <a:ea typeface="Calibri" pitchFamily="34" charset="-122"/>
                 <a:cs typeface="Calibri" pitchFamily="34" charset="-120"/>
               </a:rPr>
-              <a:t>Word Labs  •  wordlabs.app  •  Root: 'hard' = firm, difficult, or strong</a:t>
+              <a:t>Word Labs  •  wordlabs.app  •  Root: 'hard' = firm, solid, difficult, tough</a:t>
             </a:r>
             <a:endParaRPr lang="en-US" sz="800" dirty="0"/>
           </a:p>
@@ -32856,7 +33600,7 @@
                 <a:ea typeface="Trebuchet MS" pitchFamily="34" charset="-122"/>
                 <a:cs typeface="Trebuchet MS" pitchFamily="34" charset="-120"/>
               </a:rPr>
-              <a:t>die-</a:t>
+              <a:t>over-</a:t>
             </a:r>
             <a:endParaRPr lang="en-US" sz="1300" dirty="0"/>
           </a:p>
@@ -32984,7 +33728,7 @@
                 <a:ea typeface="Trebuchet MS" pitchFamily="34" charset="-122"/>
                 <a:cs typeface="Trebuchet MS" pitchFamily="34" charset="-120"/>
               </a:rPr>
-              <a:t>--en</a:t>
+              <a:t>-en</a:t>
             </a:r>
             <a:endParaRPr lang="en-US" sz="1300" dirty="0"/>
           </a:p>
@@ -33048,7 +33792,7 @@
                 <a:ea typeface="Trebuchet MS" pitchFamily="34" charset="-122"/>
                 <a:cs typeface="Trebuchet MS" pitchFamily="34" charset="-120"/>
               </a:rPr>
-              <a:t>bake-</a:t>
+              <a:t>un-</a:t>
             </a:r>
             <a:endParaRPr lang="en-US" sz="1300" dirty="0"/>
           </a:p>
@@ -33137,7 +33881,7 @@
                 <a:ea typeface="Trebuchet MS" pitchFamily="34" charset="-122"/>
                 <a:cs typeface="Trebuchet MS" pitchFamily="34" charset="-120"/>
               </a:rPr>
-              <a:t>--ly</a:t>
+              <a:t>-er</a:t>
             </a:r>
             <a:endParaRPr lang="en-US" sz="1300" dirty="0"/>
           </a:p>
@@ -33201,7 +33945,7 @@
                 <a:ea typeface="Trebuchet MS" pitchFamily="34" charset="-122"/>
                 <a:cs typeface="Trebuchet MS" pitchFamily="34" charset="-120"/>
               </a:rPr>
-              <a:t>card-</a:t>
+              <a:t>out-</a:t>
             </a:r>
             <a:endParaRPr lang="en-US" sz="1300" dirty="0"/>
           </a:p>
@@ -33290,7 +34034,7 @@
                 <a:ea typeface="Trebuchet MS" pitchFamily="34" charset="-122"/>
                 <a:cs typeface="Trebuchet MS" pitchFamily="34" charset="-120"/>
               </a:rPr>
-              <a:t>--ness</a:t>
+              <a:t>-est</a:t>
             </a:r>
             <a:endParaRPr lang="en-US" sz="1300" dirty="0"/>
           </a:p>
@@ -33354,7 +34098,7 @@
                 <a:ea typeface="Trebuchet MS" pitchFamily="34" charset="-122"/>
                 <a:cs typeface="Trebuchet MS" pitchFamily="34" charset="-120"/>
               </a:rPr>
-              <a:t>over-</a:t>
+              <a:t>die-</a:t>
             </a:r>
             <a:endParaRPr lang="en-US" sz="1300" dirty="0"/>
           </a:p>
@@ -33443,7 +34187,7 @@
                 <a:ea typeface="Trebuchet MS" pitchFamily="34" charset="-122"/>
                 <a:cs typeface="Trebuchet MS" pitchFamily="34" charset="-120"/>
               </a:rPr>
-              <a:t>--ship</a:t>
+              <a:t>-ly</a:t>
             </a:r>
             <a:endParaRPr lang="en-US" sz="1300" dirty="0"/>
           </a:p>
@@ -33507,7 +34251,7 @@
                 <a:ea typeface="Trebuchet MS" pitchFamily="34" charset="-122"/>
                 <a:cs typeface="Trebuchet MS" pitchFamily="34" charset="-120"/>
               </a:rPr>
-              <a:t>fool-</a:t>
+              <a:t>re-</a:t>
             </a:r>
             <a:endParaRPr lang="en-US" sz="1300" dirty="0"/>
           </a:p>
@@ -33596,7 +34340,7 @@
                 <a:ea typeface="Trebuchet MS" pitchFamily="34" charset="-122"/>
                 <a:cs typeface="Trebuchet MS" pitchFamily="34" charset="-120"/>
               </a:rPr>
-              <a:t>--ware</a:t>
+              <a:t>-ship</a:t>
             </a:r>
             <a:endParaRPr lang="en-US" sz="1300" dirty="0"/>
           </a:p>
@@ -33767,7 +34511,7 @@
                 <a:ea typeface="Trebuchet MS" pitchFamily="34" charset="-122"/>
                 <a:cs typeface="Trebuchet MS" pitchFamily="34" charset="-120"/>
               </a:rPr>
-              <a:t>hardly</a:t>
+              <a:t>harder</a:t>
             </a:r>
             <a:endParaRPr lang="en-US" sz="1200" dirty="0"/>
           </a:p>
@@ -33833,7 +34577,7 @@
                 <a:ea typeface="Trebuchet MS" pitchFamily="34" charset="-122"/>
                 <a:cs typeface="Trebuchet MS" pitchFamily="34" charset="-120"/>
               </a:rPr>
-              <a:t>hardship</a:t>
+              <a:t>hardest</a:t>
             </a:r>
             <a:endParaRPr lang="en-US" sz="1200" dirty="0"/>
           </a:p>
@@ -33899,7 +34643,7 @@
                 <a:ea typeface="Trebuchet MS" pitchFamily="34" charset="-122"/>
                 <a:cs typeface="Trebuchet MS" pitchFamily="34" charset="-120"/>
               </a:rPr>
-              <a:t>hardness</a:t>
+              <a:t>hardly</a:t>
             </a:r>
             <a:endParaRPr lang="en-US" sz="1200" dirty="0"/>
           </a:p>
@@ -33965,7 +34709,7 @@
                 <a:ea typeface="Trebuchet MS" pitchFamily="34" charset="-122"/>
                 <a:cs typeface="Trebuchet MS" pitchFamily="34" charset="-120"/>
               </a:rPr>
-              <a:t>hardware</a:t>
+              <a:t>hardship</a:t>
             </a:r>
             <a:endParaRPr lang="en-US" sz="1200" dirty="0"/>
           </a:p>
@@ -34031,7 +34775,7 @@
                 <a:ea typeface="Trebuchet MS" pitchFamily="34" charset="-122"/>
                 <a:cs typeface="Trebuchet MS" pitchFamily="34" charset="-120"/>
               </a:rPr>
-              <a:t>diehard</a:t>
+              <a:t>hardness</a:t>
             </a:r>
             <a:endParaRPr lang="en-US" sz="1200" dirty="0"/>
           </a:p>
@@ -34097,7 +34841,7 @@
                 <a:ea typeface="Trebuchet MS" pitchFamily="34" charset="-122"/>
                 <a:cs typeface="Trebuchet MS" pitchFamily="34" charset="-120"/>
               </a:rPr>
-              <a:t>hardback</a:t>
+              <a:t>hardworking</a:t>
             </a:r>
             <a:endParaRPr lang="en-US" sz="1200" dirty="0"/>
           </a:p>
@@ -34163,7 +34907,7 @@
                 <a:ea typeface="Trebuchet MS" pitchFamily="34" charset="-122"/>
                 <a:cs typeface="Trebuchet MS" pitchFamily="34" charset="-120"/>
               </a:rPr>
-              <a:t>overhard</a:t>
+              <a:t>diehard</a:t>
             </a:r>
             <a:endParaRPr lang="en-US" sz="1200" dirty="0"/>
           </a:p>
@@ -34455,7 +35199,7 @@
                 <a:ea typeface="Calibri" pitchFamily="34" charset="-122"/>
                 <a:cs typeface="Calibri" pitchFamily="34" charset="-120"/>
               </a:rPr>
-              <a:t>Word Labs  •  wordlabs.app  •  Root: 'hard' = firm, difficult, or strong</a:t>
+              <a:t>Word Labs  •  wordlabs.app  •  Root: 'hard' = firm, solid, difficult, tough</a:t>
             </a:r>
             <a:endParaRPr lang="en-US" sz="800" dirty="0"/>
           </a:p>
@@ -34619,7 +35363,7 @@
                 <a:ea typeface="Calibri" pitchFamily="34" charset="-122"/>
                 <a:cs typeface="Calibri" pitchFamily="34" charset="-120"/>
               </a:rPr>
-              <a:t>The core part of a word carrying its basic meaning. For example, 'hard' means 'firm, difficult, or strong'.</a:t>
+              <a:t>The core part of a word carrying its basic meaning. For example, 'hard' means 'firm, solid, difficult, tough'.</a:t>
             </a:r>
             <a:endParaRPr lang="en-US" sz="1350" dirty="0"/>
           </a:p>
@@ -35239,7 +35983,7 @@
                 <a:ea typeface="Calibri" pitchFamily="34" charset="-122"/>
                 <a:cs typeface="Calibri" pitchFamily="34" charset="-120"/>
               </a:rPr>
-              <a:t>Word Labs  •  wordlabs.app  •  Root: 'hard' = firm, difficult, or strong</a:t>
+              <a:t>Word Labs  •  wordlabs.app  •  Root: 'hard' = firm, solid, difficult, tough</a:t>
             </a:r>
             <a:endParaRPr lang="en-US" sz="800" dirty="0"/>
           </a:p>
@@ -35351,7 +36095,7 @@
                 <a:ea typeface="Calibri" pitchFamily="34" charset="-122"/>
                 <a:cs typeface="Calibri" pitchFamily="34" charset="-120"/>
               </a:rPr>
-              <a:t>1.  The word 'hardship' contains the root 'hard' and the suffix '-ship'.</a:t>
+              <a:t>1.  The root 'hard' can be found in words like 'hardness' and 'hardworking'.</a:t>
             </a:r>
             <a:endParaRPr lang="en-US" sz="1300" dirty="0"/>
           </a:p>
@@ -35490,7 +36234,7 @@
                 <a:ea typeface="Calibri" pitchFamily="34" charset="-122"/>
                 <a:cs typeface="Calibri" pitchFamily="34" charset="-120"/>
               </a:rPr>
-              <a:t>2.  The word 'hardly' means the same as 'very much'.</a:t>
+              <a:t>2.  The word 'hardly' contains the root 'hard' and means almost not at all.</a:t>
             </a:r>
             <a:endParaRPr lang="en-US" sz="1300" dirty="0"/>
           </a:p>
@@ -35513,11 +36257,11 @@
             </a:avLst>
           </a:prstGeom>
           <a:solidFill>
-            <a:srgbClr val="FEE2E2"/>
-          </a:solidFill>
-          <a:ln w="12700">
-            <a:solidFill>
-              <a:srgbClr val="DC2626"/>
+            <a:srgbClr val="DCFCE7"/>
+          </a:solidFill>
+          <a:ln w="12700">
+            <a:solidFill>
+              <a:srgbClr val="16A34A"/>
             </a:solidFill>
             <a:prstDash val="solid"/>
           </a:ln>
@@ -35550,13 +36294,13 @@
             <a:r>
               <a:rPr lang="en-US" sz="1100" b="1" dirty="0">
                 <a:solidFill>
-                  <a:srgbClr val="DC2626"/>
+                  <a:srgbClr val="16A34A"/>
                 </a:solidFill>
                 <a:latin typeface="Trebuchet MS" pitchFamily="34" charset="0"/>
                 <a:ea typeface="Trebuchet MS" pitchFamily="34" charset="-122"/>
                 <a:cs typeface="Trebuchet MS" pitchFamily="34" charset="-120"/>
               </a:rPr>
-              <a:t>FALSE</a:t>
+              <a:t>TRUE</a:t>
             </a:r>
             <a:endParaRPr lang="en-US" sz="1100" dirty="0"/>
           </a:p>
@@ -35629,7 +36373,7 @@
                 <a:ea typeface="Calibri" pitchFamily="34" charset="-122"/>
                 <a:cs typeface="Calibri" pitchFamily="34" charset="-120"/>
               </a:rPr>
-              <a:t>3.  A 'hardback' book has a stiff, firm cover.</a:t>
+              <a:t>3.  The root 'hard' comes from ancient Greek.</a:t>
             </a:r>
             <a:endParaRPr lang="en-US" sz="1300" dirty="0"/>
           </a:p>
@@ -35652,11 +36396,11 @@
             </a:avLst>
           </a:prstGeom>
           <a:solidFill>
-            <a:srgbClr val="DCFCE7"/>
-          </a:solidFill>
-          <a:ln w="12700">
-            <a:solidFill>
-              <a:srgbClr val="16A34A"/>
+            <a:srgbClr val="FEE2E2"/>
+          </a:solidFill>
+          <a:ln w="12700">
+            <a:solidFill>
+              <a:srgbClr val="DC2626"/>
             </a:solidFill>
             <a:prstDash val="solid"/>
           </a:ln>
@@ -35689,13 +36433,13 @@
             <a:r>
               <a:rPr lang="en-US" sz="1100" b="1" dirty="0">
                 <a:solidFill>
-                  <a:srgbClr val="16A34A"/>
+                  <a:srgbClr val="DC2626"/>
                 </a:solidFill>
                 <a:latin typeface="Trebuchet MS" pitchFamily="34" charset="0"/>
                 <a:ea typeface="Trebuchet MS" pitchFamily="34" charset="-122"/>
                 <a:cs typeface="Trebuchet MS" pitchFamily="34" charset="-120"/>
               </a:rPr>
-              <a:t>TRUE</a:t>
+              <a:t>FALSE</a:t>
             </a:r>
             <a:endParaRPr lang="en-US" sz="1100" dirty="0"/>
           </a:p>
@@ -35768,7 +36512,7 @@
                 <a:ea typeface="Calibri" pitchFamily="34" charset="-122"/>
                 <a:cs typeface="Calibri" pitchFamily="34" charset="-120"/>
               </a:rPr>
-              <a:t>4.  The root 'hard' can mean something that is difficult or firm.</a:t>
+              <a:t>4.  Adding the suffix '-en' to 'hard' makes the verb 'harden', meaning to become firm.</a:t>
             </a:r>
             <a:endParaRPr lang="en-US" sz="1300" dirty="0"/>
           </a:p>
@@ -35907,7 +36651,7 @@
                 <a:ea typeface="Calibri" pitchFamily="34" charset="-122"/>
                 <a:cs typeface="Calibri" pitchFamily="34" charset="-120"/>
               </a:rPr>
-              <a:t>5.  The word 'hardware' has nothing to do with the root 'hard'.</a:t>
+              <a:t>5.  The word 'hardship' means something that is very easy and comfortable.</a:t>
             </a:r>
             <a:endParaRPr lang="en-US" sz="1300" dirty="0"/>
           </a:p>
@@ -36265,7 +37009,7 @@
                 <a:ea typeface="Calibri" pitchFamily="34" charset="-122"/>
                 <a:cs typeface="Calibri" pitchFamily="34" charset="-120"/>
               </a:rPr>
-              <a:t>Word Labs  •  wordlabs.app  •  Root: 'hard' = firm, difficult, or strong</a:t>
+              <a:t>Word Labs  •  wordlabs.app  •  Root: 'hard' = firm, solid, difficult, tough</a:t>
             </a:r>
             <a:endParaRPr lang="en-US" sz="800" dirty="0"/>
           </a:p>
@@ -36402,7 +37146,7 @@
                 <a:ea typeface="Trebuchet MS" pitchFamily="34" charset="-122"/>
                 <a:cs typeface="Trebuchet MS" pitchFamily="34" charset="-120"/>
               </a:rPr>
-              <a:t>firm, difficult, or strong</a:t>
+              <a:t>firm, solid, difficult, tough</a:t>
             </a:r>
             <a:endParaRPr lang="en-US" sz="2000" dirty="0"/>
           </a:p>
@@ -36612,7 +37356,7 @@
                 <a:ea typeface="Trebuchet MS" pitchFamily="34" charset="-122"/>
                 <a:cs typeface="Trebuchet MS" pitchFamily="34" charset="-120"/>
               </a:rPr>
-              <a:t>hardly</a:t>
+              <a:t>harder</a:t>
             </a:r>
             <a:endParaRPr lang="en-US" sz="1300" dirty="0"/>
           </a:p>
@@ -36678,7 +37422,7 @@
                 <a:ea typeface="Trebuchet MS" pitchFamily="34" charset="-122"/>
                 <a:cs typeface="Trebuchet MS" pitchFamily="34" charset="-120"/>
               </a:rPr>
-              <a:t>hardship</a:t>
+              <a:t>hardest</a:t>
             </a:r>
             <a:endParaRPr lang="en-US" sz="1300" dirty="0"/>
           </a:p>
@@ -36744,7 +37488,7 @@
                 <a:ea typeface="Trebuchet MS" pitchFamily="34" charset="-122"/>
                 <a:cs typeface="Trebuchet MS" pitchFamily="34" charset="-120"/>
               </a:rPr>
-              <a:t>hardness</a:t>
+              <a:t>hardly</a:t>
             </a:r>
             <a:endParaRPr lang="en-US" sz="1300" dirty="0"/>
           </a:p>
@@ -36810,7 +37554,7 @@
                 <a:ea typeface="Trebuchet MS" pitchFamily="34" charset="-122"/>
                 <a:cs typeface="Trebuchet MS" pitchFamily="34" charset="-120"/>
               </a:rPr>
-              <a:t>hardware</a:t>
+              <a:t>hardship</a:t>
             </a:r>
             <a:endParaRPr lang="en-US" sz="1300" dirty="0"/>
           </a:p>
@@ -36876,7 +37620,7 @@
                 <a:ea typeface="Trebuchet MS" pitchFamily="34" charset="-122"/>
                 <a:cs typeface="Trebuchet MS" pitchFamily="34" charset="-120"/>
               </a:rPr>
-              <a:t>diehard</a:t>
+              <a:t>hardness</a:t>
             </a:r>
             <a:endParaRPr lang="en-US" sz="1300" dirty="0"/>
           </a:p>
@@ -36942,7 +37686,7 @@
                 <a:ea typeface="Trebuchet MS" pitchFamily="34" charset="-122"/>
                 <a:cs typeface="Trebuchet MS" pitchFamily="34" charset="-120"/>
               </a:rPr>
-              <a:t>hardback</a:t>
+              <a:t>hardworking</a:t>
             </a:r>
             <a:endParaRPr lang="en-US" sz="1300" dirty="0"/>
           </a:p>
@@ -37234,7 +37978,7 @@
                 <a:ea typeface="Calibri" pitchFamily="34" charset="-122"/>
                 <a:cs typeface="Calibri" pitchFamily="34" charset="-120"/>
               </a:rPr>
-              <a:t>Word Labs  •  wordlabs.app  •  Root: 'hard' = firm, difficult, or strong</a:t>
+              <a:t>Word Labs  •  wordlabs.app  •  Root: 'hard' = firm, solid, difficult, tough</a:t>
             </a:r>
             <a:endParaRPr lang="en-US" sz="800" dirty="0"/>
           </a:p>
@@ -37535,7 +38279,7 @@
                 <a:ea typeface="Trebuchet MS" pitchFamily="34" charset="-122"/>
                 <a:cs typeface="Trebuchet MS" pitchFamily="34" charset="-120"/>
               </a:rPr>
-              <a:t>die-</a:t>
+              <a:t>over-</a:t>
             </a:r>
             <a:endParaRPr lang="en-US" sz="1300" dirty="0"/>
           </a:p>
@@ -37663,7 +38407,7 @@
                 <a:ea typeface="Trebuchet MS" pitchFamily="34" charset="-122"/>
                 <a:cs typeface="Trebuchet MS" pitchFamily="34" charset="-120"/>
               </a:rPr>
-              <a:t>--en</a:t>
+              <a:t>-en</a:t>
             </a:r>
             <a:endParaRPr lang="en-US" sz="1300" dirty="0"/>
           </a:p>
@@ -37727,7 +38471,7 @@
                 <a:ea typeface="Trebuchet MS" pitchFamily="34" charset="-122"/>
                 <a:cs typeface="Trebuchet MS" pitchFamily="34" charset="-120"/>
               </a:rPr>
-              <a:t>bake-</a:t>
+              <a:t>un-</a:t>
             </a:r>
             <a:endParaRPr lang="en-US" sz="1300" dirty="0"/>
           </a:p>
@@ -37816,7 +38560,7 @@
                 <a:ea typeface="Trebuchet MS" pitchFamily="34" charset="-122"/>
                 <a:cs typeface="Trebuchet MS" pitchFamily="34" charset="-120"/>
               </a:rPr>
-              <a:t>--ly</a:t>
+              <a:t>-er</a:t>
             </a:r>
             <a:endParaRPr lang="en-US" sz="1300" dirty="0"/>
           </a:p>
@@ -37880,7 +38624,7 @@
                 <a:ea typeface="Trebuchet MS" pitchFamily="34" charset="-122"/>
                 <a:cs typeface="Trebuchet MS" pitchFamily="34" charset="-120"/>
               </a:rPr>
-              <a:t>card-</a:t>
+              <a:t>out-</a:t>
             </a:r>
             <a:endParaRPr lang="en-US" sz="1300" dirty="0"/>
           </a:p>
@@ -37969,7 +38713,7 @@
                 <a:ea typeface="Trebuchet MS" pitchFamily="34" charset="-122"/>
                 <a:cs typeface="Trebuchet MS" pitchFamily="34" charset="-120"/>
               </a:rPr>
-              <a:t>--ness</a:t>
+              <a:t>-est</a:t>
             </a:r>
             <a:endParaRPr lang="en-US" sz="1300" dirty="0"/>
           </a:p>
@@ -38033,7 +38777,7 @@
                 <a:ea typeface="Trebuchet MS" pitchFamily="34" charset="-122"/>
                 <a:cs typeface="Trebuchet MS" pitchFamily="34" charset="-120"/>
               </a:rPr>
-              <a:t>over-</a:t>
+              <a:t>die-</a:t>
             </a:r>
             <a:endParaRPr lang="en-US" sz="1300" dirty="0"/>
           </a:p>
@@ -38122,7 +38866,7 @@
                 <a:ea typeface="Trebuchet MS" pitchFamily="34" charset="-122"/>
                 <a:cs typeface="Trebuchet MS" pitchFamily="34" charset="-120"/>
               </a:rPr>
-              <a:t>--ship</a:t>
+              <a:t>-ly</a:t>
             </a:r>
             <a:endParaRPr lang="en-US" sz="1300" dirty="0"/>
           </a:p>
@@ -38186,7 +38930,7 @@
                 <a:ea typeface="Trebuchet MS" pitchFamily="34" charset="-122"/>
                 <a:cs typeface="Trebuchet MS" pitchFamily="34" charset="-120"/>
               </a:rPr>
-              <a:t>fool-</a:t>
+              <a:t>re-</a:t>
             </a:r>
             <a:endParaRPr lang="en-US" sz="1300" dirty="0"/>
           </a:p>
@@ -38275,7 +39019,7 @@
                 <a:ea typeface="Trebuchet MS" pitchFamily="34" charset="-122"/>
                 <a:cs typeface="Trebuchet MS" pitchFamily="34" charset="-120"/>
               </a:rPr>
-              <a:t>--ware</a:t>
+              <a:t>-ship</a:t>
             </a:r>
             <a:endParaRPr lang="en-US" sz="1300" dirty="0"/>
           </a:p>
@@ -38329,7 +39073,7 @@
         <p:spPr>
           <a:xfrm>
             <a:off x="1508760" y="4178808"/>
-            <a:ext cx="950976" cy="420624"/>
+            <a:ext cx="1097280" cy="420624"/>
           </a:xfrm>
           <a:prstGeom prst="rect">
             <a:avLst>
@@ -38363,7 +39107,7 @@
         <p:spPr>
           <a:xfrm>
             <a:off x="1508760" y="4178808"/>
-            <a:ext cx="950976" cy="420624"/>
+            <a:ext cx="1097280" cy="420624"/>
           </a:xfrm>
           <a:prstGeom prst="rect">
             <a:avLst/>
@@ -38387,7 +39131,7 @@
                 <a:ea typeface="Trebuchet MS" pitchFamily="34" charset="-122"/>
                 <a:cs typeface="Trebuchet MS" pitchFamily="34" charset="-120"/>
               </a:rPr>
-              <a:t>die-</a:t>
+              <a:t>over-</a:t>
             </a:r>
             <a:endParaRPr lang="en-US" sz="1300" dirty="0"/>
           </a:p>
@@ -38401,7 +39145,7 @@
         </p:nvSpPr>
         <p:spPr>
           <a:xfrm>
-            <a:off x="2487168" y="4178808"/>
+            <a:off x="2633472" y="4178808"/>
             <a:ext cx="320040" cy="420624"/>
           </a:xfrm>
           <a:prstGeom prst="rect">
@@ -38440,7 +39184,7 @@
         </p:nvSpPr>
         <p:spPr>
           <a:xfrm>
-            <a:off x="2834640" y="4178808"/>
+            <a:off x="2980944" y="4178808"/>
             <a:ext cx="1243584" cy="420624"/>
           </a:xfrm>
           <a:prstGeom prst="rect">
@@ -38474,7 +39218,7 @@
         </p:nvSpPr>
         <p:spPr>
           <a:xfrm>
-            <a:off x="2834640" y="4178808"/>
+            <a:off x="2980944" y="4178808"/>
             <a:ext cx="1243584" cy="420624"/>
           </a:xfrm>
           <a:prstGeom prst="rect">
@@ -38513,7 +39257,7 @@
         </p:nvSpPr>
         <p:spPr>
           <a:xfrm>
-            <a:off x="4105656" y="4178808"/>
+            <a:off x="4251960" y="4178808"/>
             <a:ext cx="320040" cy="420624"/>
           </a:xfrm>
           <a:prstGeom prst="rect">
@@ -38552,8 +39296,8 @@
         </p:nvSpPr>
         <p:spPr>
           <a:xfrm>
-            <a:off x="4453128" y="4178808"/>
-            <a:ext cx="950976" cy="420624"/>
+            <a:off x="4599432" y="4178808"/>
+            <a:ext cx="822960" cy="420624"/>
           </a:xfrm>
           <a:prstGeom prst="rect">
             <a:avLst>
@@ -38586,8 +39330,8 @@
         </p:nvSpPr>
         <p:spPr>
           <a:xfrm>
-            <a:off x="4453128" y="4178808"/>
-            <a:ext cx="950976" cy="420624"/>
+            <a:off x="4599432" y="4178808"/>
+            <a:ext cx="822960" cy="420624"/>
           </a:xfrm>
           <a:prstGeom prst="rect">
             <a:avLst/>
@@ -38611,7 +39355,7 @@
                 <a:ea typeface="Trebuchet MS" pitchFamily="34" charset="-122"/>
                 <a:cs typeface="Trebuchet MS" pitchFamily="34" charset="-120"/>
               </a:rPr>
-              <a:t>--en</a:t>
+              <a:t>-en</a:t>
             </a:r>
             <a:endParaRPr lang="en-US" sz="1300" dirty="0"/>
           </a:p>
@@ -38625,7 +39369,7 @@
         </p:nvSpPr>
         <p:spPr>
           <a:xfrm>
-            <a:off x="5477256" y="4178808"/>
+            <a:off x="5495544" y="4178808"/>
             <a:ext cx="365760" cy="420624"/>
           </a:xfrm>
           <a:prstGeom prst="rect">
@@ -38664,7 +39408,7 @@
         </p:nvSpPr>
         <p:spPr>
           <a:xfrm>
-            <a:off x="5888736" y="4178808"/>
+            <a:off x="5907024" y="4178808"/>
             <a:ext cx="2194560" cy="420624"/>
           </a:xfrm>
           <a:prstGeom prst="rect">
@@ -38691,7 +39435,7 @@
         </p:nvSpPr>
         <p:spPr>
           <a:xfrm>
-            <a:off x="5888736" y="4178808"/>
+            <a:off x="5907024" y="4178808"/>
             <a:ext cx="2194560" cy="420624"/>
           </a:xfrm>
           <a:prstGeom prst="rect">
@@ -39008,7 +39752,7 @@
                 <a:ea typeface="Calibri" pitchFamily="34" charset="-122"/>
                 <a:cs typeface="Calibri" pitchFamily="34" charset="-120"/>
               </a:rPr>
-              <a:t>Word Labs  •  wordlabs.app  •  Root: 'hard' = firm, difficult, or strong</a:t>
+              <a:t>Word Labs  •  wordlabs.app  •  Root: 'hard' = firm, solid, difficult, tough</a:t>
             </a:r>
             <a:endParaRPr lang="en-US" sz="800" dirty="0"/>
           </a:p>
@@ -39186,7 +39930,7 @@
                 <a:ea typeface="Calibri" pitchFamily="34" charset="-122"/>
                 <a:cs typeface="Calibri" pitchFamily="34" charset="-120"/>
               </a:rPr>
-              <a:t>Tools, nails, and equipment sold in a shop — or the physical parts of a computer.</a:t>
+              <a:t>A time when life is very tough and difficult, such as not having enough food or money.</a:t>
             </a:r>
             <a:endParaRPr lang="en-US" sz="1200" dirty="0"/>
           </a:p>
@@ -39259,7 +40003,7 @@
                 <a:ea typeface="Trebuchet MS" pitchFamily="34" charset="-122"/>
                 <a:cs typeface="Trebuchet MS" pitchFamily="34" charset="-120"/>
               </a:rPr>
-              <a:t>hardly</a:t>
+              <a:t>harder</a:t>
             </a:r>
             <a:endParaRPr lang="en-US" sz="1200" dirty="0"/>
           </a:p>
@@ -39325,7 +40069,7 @@
                 <a:ea typeface="Calibri" pitchFamily="34" charset="-122"/>
                 <a:cs typeface="Calibri" pitchFamily="34" charset="-120"/>
               </a:rPr>
-              <a:t>A difficult situation that makes life tough, like not having enough food or money.</a:t>
+              <a:t>The most difficult or most firm of all things being compared.</a:t>
             </a:r>
             <a:endParaRPr lang="en-US" sz="1200" dirty="0"/>
           </a:p>
@@ -39398,7 +40142,7 @@
                 <a:ea typeface="Trebuchet MS" pitchFamily="34" charset="-122"/>
                 <a:cs typeface="Trebuchet MS" pitchFamily="34" charset="-120"/>
               </a:rPr>
-              <a:t>hardship</a:t>
+              <a:t>hardest</a:t>
             </a:r>
             <a:endParaRPr lang="en-US" sz="1200" dirty="0"/>
           </a:p>
@@ -39464,7 +40208,7 @@
                 <a:ea typeface="Calibri" pitchFamily="34" charset="-122"/>
                 <a:cs typeface="Calibri" pitchFamily="34" charset="-120"/>
               </a:rPr>
-              <a:t>Someone who refuses to change their strong beliefs or habits, no matter what.</a:t>
+              <a:t>The quality of being firm and solid, like the hardness of a diamond.</a:t>
             </a:r>
             <a:endParaRPr lang="en-US" sz="1200" dirty="0"/>
           </a:p>
@@ -39537,7 +40281,7 @@
                 <a:ea typeface="Trebuchet MS" pitchFamily="34" charset="-122"/>
                 <a:cs typeface="Trebuchet MS" pitchFamily="34" charset="-120"/>
               </a:rPr>
-              <a:t>hardness</a:t>
+              <a:t>hardly</a:t>
             </a:r>
             <a:endParaRPr lang="en-US" sz="1200" dirty="0"/>
           </a:p>
@@ -39603,7 +40347,7 @@
                 <a:ea typeface="Calibri" pitchFamily="34" charset="-122"/>
                 <a:cs typeface="Calibri" pitchFamily="34" charset="-120"/>
               </a:rPr>
-              <a:t>The quality of being firm and not easy to scratch or dent.</a:t>
+              <a:t>Almost not at all — like when you can hardly hear someone whispering.</a:t>
             </a:r>
             <a:endParaRPr lang="en-US" sz="1200" dirty="0"/>
           </a:p>
@@ -39676,7 +40420,7 @@
                 <a:ea typeface="Trebuchet MS" pitchFamily="34" charset="-122"/>
                 <a:cs typeface="Trebuchet MS" pitchFamily="34" charset="-120"/>
               </a:rPr>
-              <a:t>hardware</a:t>
+              <a:t>hardship</a:t>
             </a:r>
             <a:endParaRPr lang="en-US" sz="1200" dirty="0"/>
           </a:p>
@@ -39742,7 +40486,7 @@
                 <a:ea typeface="Calibri" pitchFamily="34" charset="-122"/>
                 <a:cs typeface="Calibri" pitchFamily="34" charset="-120"/>
               </a:rPr>
-              <a:t>To make something become firm or solid, like concrete hardening as it dries.</a:t>
+              <a:t>To make something firm or solid, like cement drying in the sun.</a:t>
             </a:r>
             <a:endParaRPr lang="en-US" sz="1200" dirty="0"/>
           </a:p>
@@ -39815,7 +40559,7 @@
                 <a:ea typeface="Trebuchet MS" pitchFamily="34" charset="-122"/>
                 <a:cs typeface="Trebuchet MS" pitchFamily="34" charset="-120"/>
               </a:rPr>
-              <a:t>diehard</a:t>
+              <a:t>hardness</a:t>
             </a:r>
             <a:endParaRPr lang="en-US" sz="1200" dirty="0"/>
           </a:p>
@@ -39881,7 +40625,7 @@
                 <a:ea typeface="Calibri" pitchFamily="34" charset="-122"/>
                 <a:cs typeface="Calibri" pitchFamily="34" charset="-120"/>
               </a:rPr>
-              <a:t>A book that has a thick, stiff cover instead of a soft, bendy one.</a:t>
+              <a:t>Always putting in a lot of effort and not giving up easily.</a:t>
             </a:r>
             <a:endParaRPr lang="en-US" sz="1200" dirty="0"/>
           </a:p>
@@ -39954,7 +40698,7 @@
                 <a:ea typeface="Trebuchet MS" pitchFamily="34" charset="-122"/>
                 <a:cs typeface="Trebuchet MS" pitchFamily="34" charset="-120"/>
               </a:rPr>
-              <a:t>hardback</a:t>
+              <a:t>hardworking</a:t>
             </a:r>
             <a:endParaRPr lang="en-US" sz="1200" dirty="0"/>
           </a:p>
@@ -40020,7 +40764,7 @@
                 <a:ea typeface="Calibri" pitchFamily="34" charset="-122"/>
                 <a:cs typeface="Calibri" pitchFamily="34" charset="-120"/>
               </a:rPr>
-              <a:t>Almost not at all — if you hardly slept, you got very little sleep.</a:t>
+              <a:t>More difficult or more firm than something else.</a:t>
             </a:r>
             <a:endParaRPr lang="en-US" sz="1200" dirty="0"/>
           </a:p>
@@ -40312,7 +41056,7 @@
                 <a:ea typeface="Calibri" pitchFamily="34" charset="-122"/>
                 <a:cs typeface="Calibri" pitchFamily="34" charset="-120"/>
               </a:rPr>
-              <a:t>Word Labs  •  wordlabs.app  •  Root: 'hard' = firm, difficult, or strong</a:t>
+              <a:t>Word Labs  •  wordlabs.app  •  Root: 'hard' = firm, solid, difficult, tough</a:t>
             </a:r>
             <a:endParaRPr lang="en-US" sz="800" dirty="0"/>
           </a:p>
@@ -40515,7 +41259,7 @@
                 <a:ea typeface="Calibri" pitchFamily="34" charset="-122"/>
                 <a:cs typeface="Calibri" pitchFamily="34" charset="-120"/>
               </a:rPr>
-              <a:t>The builder said the concrete would harden overnight and be ready to walk on by morning.</a:t>
+              <a:t>The athlete trained hard every day, showing incredible hardship and determination to reach her goal.</a:t>
             </a:r>
             <a:endParaRPr lang="en-US" sz="1500" dirty="0"/>
           </a:p>
@@ -40679,7 +41423,7 @@
                 <a:ea typeface="Calibri" pitchFamily="34" charset="-122"/>
                 <a:cs typeface="Calibri" pitchFamily="34" charset="-120"/>
               </a:rPr>
-              <a:t>She worked so hard on her project that she hardly had time to eat lunch.</a:t>
+              <a:t>The teacher explained that diamonds have an extraordinary hardness, making them the toughest natural material on Earth.</a:t>
             </a:r>
             <a:endParaRPr lang="en-US" sz="1500" dirty="0"/>
           </a:p>
@@ -40843,7 +41587,7 @@
                 <a:ea typeface="Calibri" pitchFamily="34" charset="-122"/>
                 <a:cs typeface="Calibri" pitchFamily="34" charset="-120"/>
               </a:rPr>
-              <a:t>Living without clean water is a real hardship that many people around the world face every day.</a:t>
+              <a:t>After the long bushwalk, the children could hardly lift their tired legs as they trudged back to camp.</a:t>
             </a:r>
             <a:endParaRPr lang="en-US" sz="1500" dirty="0"/>
           </a:p>
